--- a/exports/pptx/lessons/senior-module-02-panchabhuta/day-07-discussion.pptx
+++ b/exports/pptx/lessons/senior-module-02-panchabhuta/day-07-discussion.pptx
@@ -3341,6 +3341,208 @@
         </p:nvSpPr>
         <p:spPr>
           <a:xfrm>
+            <a:off x="406301" y="1160413"/>
+            <a:ext cx="8498026" cy="213271"/>
+          </a:xfrm>
+          <a:prstGeom prst="rect">
+            <a:avLst/>
+          </a:prstGeom>
+          <a:noFill/>
+          <a:ln/>
+        </p:spPr>
+        <p:txBody>
+          <a:bodyPr wrap="square" lIns="0" tIns="0" rIns="0" bIns="0" rtlCol="0" anchor="t"/>
+          <a:lstStyle/>
+          <a:p>
+            <a:pPr algn="l" indent="0" marL="0">
+              <a:lnSpc>
+                <a:spcPts val="1680"/>
+              </a:lnSpc>
+              <a:spcBef>
+                <a:spcPts val="300"/>
+              </a:spcBef>
+              <a:spcAft>
+                <a:spcPts val="300"/>
+              </a:spcAft>
+              <a:buNone/>
+            </a:pPr>
+            <a:r>
+              <a:rPr lang="en-US" sz="1200" i="1" dirty="0">
+                <a:solidFill>
+                  <a:srgbClr val="1A1A1A"/>
+                </a:solidFill>
+                <a:latin typeface="Georgia" pitchFamily="34" charset="0"/>
+                <a:ea typeface="Georgia" pitchFamily="34" charset="-122"/>
+                <a:cs typeface="Georgia" pitchFamily="34" charset="-120"/>
+              </a:rPr>
+              <a:t>Each row: Position · One-line claim.</a:t>
+            </a:r>
+            <a:endParaRPr lang="en-US" sz="1200" dirty="0"/>
+          </a:p>
+        </p:txBody>
+      </p:sp>
+      <p:sp>
+        <p:nvSpPr>
+          <p:cNvPr id="6" name="Text 4"/>
+          <p:cNvSpPr/>
+          <p:nvPr/>
+        </p:nvSpPr>
+        <p:spPr>
+          <a:xfrm>
+            <a:off x="634901" y="1462534"/>
+            <a:ext cx="8102798" cy="769441"/>
+          </a:xfrm>
+          <a:prstGeom prst="rect">
+            <a:avLst/>
+          </a:prstGeom>
+          <a:noFill/>
+          <a:ln/>
+        </p:spPr>
+        <p:txBody>
+          <a:bodyPr wrap="square" lIns="0" tIns="0" rIns="0" bIns="0" rtlCol="0" anchor="t"/>
+          <a:lstStyle/>
+          <a:p>
+            <a:pPr algn="l" marL="342900" indent="-342900">
+              <a:lnSpc>
+                <a:spcPts val="1620"/>
+              </a:lnSpc>
+              <a:spcAft>
+                <a:spcPts val="300"/>
+              </a:spcAft>
+              <a:buSzPct val="100000"/>
+              <a:buChar char="•"/>
+            </a:pPr>
+            <a:r>
+              <a:rPr lang="en-US" sz="1200" b="1" dirty="0">
+                <a:solidFill>
+                  <a:srgbClr val="1A1A1A"/>
+                </a:solidFill>
+                <a:latin typeface="Georgia" pitchFamily="34" charset="0"/>
+                <a:ea typeface="Georgia" pitchFamily="34" charset="-122"/>
+                <a:cs typeface="Georgia" pitchFamily="34" charset="-120"/>
+              </a:rPr>
+              <a:t>A — Integration</a:t>
+            </a:r>
+            <a:pPr algn="l" indent="0" marL="0">
+              <a:lnSpc>
+                <a:spcPts val="1620"/>
+              </a:lnSpc>
+              <a:spcAft>
+                <a:spcPts val="300"/>
+              </a:spcAft>
+              <a:buNone/>
+            </a:pPr>
+            <a:r>
+              <a:rPr lang="en-US" sz="1200" dirty="0">
+                <a:solidFill>
+                  <a:srgbClr val="1A1A1A"/>
+                </a:solidFill>
+                <a:latin typeface="Georgia" pitchFamily="34" charset="0"/>
+                <a:ea typeface="Georgia" pitchFamily="34" charset="-122"/>
+                <a:cs typeface="Georgia" pitchFamily="34" charset="-120"/>
+              </a:rPr>
+              <a:t> — IKS frameworks should be taught alongside modern science in mainstream science class.</a:t>
+            </a:r>
+            <a:endParaRPr lang="en-US" sz="1200" dirty="0"/>
+          </a:p>
+          <a:p>
+            <a:pPr algn="l" marL="342900" indent="-342900">
+              <a:lnSpc>
+                <a:spcPts val="1620"/>
+              </a:lnSpc>
+              <a:spcAft>
+                <a:spcPts val="300"/>
+              </a:spcAft>
+              <a:buSzPct val="100000"/>
+              <a:buChar char="•"/>
+            </a:pPr>
+            <a:r>
+              <a:rPr lang="en-US" sz="1200" b="1" dirty="0">
+                <a:solidFill>
+                  <a:srgbClr val="1A1A1A"/>
+                </a:solidFill>
+                <a:latin typeface="Georgia" pitchFamily="34" charset="0"/>
+                <a:ea typeface="Georgia" pitchFamily="34" charset="-122"/>
+                <a:cs typeface="Georgia" pitchFamily="34" charset="-120"/>
+              </a:rPr>
+              <a:t>B — Separation</a:t>
+            </a:r>
+            <a:pPr algn="l" indent="0" marL="0">
+              <a:lnSpc>
+                <a:spcPts val="1620"/>
+              </a:lnSpc>
+              <a:spcAft>
+                <a:spcPts val="300"/>
+              </a:spcAft>
+              <a:buNone/>
+            </a:pPr>
+            <a:r>
+              <a:rPr lang="en-US" sz="1200" dirty="0">
+                <a:solidFill>
+                  <a:srgbClr val="1A1A1A"/>
+                </a:solidFill>
+                <a:latin typeface="Georgia" pitchFamily="34" charset="0"/>
+                <a:ea typeface="Georgia" pitchFamily="34" charset="-122"/>
+                <a:cs typeface="Georgia" pitchFamily="34" charset="-120"/>
+              </a:rPr>
+              <a:t> — IKS should be taught in cultural studies or philosophy, not in science class.</a:t>
+            </a:r>
+            <a:endParaRPr lang="en-US" sz="1200" dirty="0"/>
+          </a:p>
+          <a:p>
+            <a:pPr algn="l" marL="342900" indent="-342900">
+              <a:lnSpc>
+                <a:spcPts val="1620"/>
+              </a:lnSpc>
+              <a:spcAft>
+                <a:spcPts val="300"/>
+              </a:spcAft>
+              <a:buSzPct val="100000"/>
+              <a:buChar char="•"/>
+            </a:pPr>
+            <a:r>
+              <a:rPr lang="en-US" sz="1200" b="1" dirty="0">
+                <a:solidFill>
+                  <a:srgbClr val="1A1A1A"/>
+                </a:solidFill>
+                <a:latin typeface="Georgia" pitchFamily="34" charset="0"/>
+                <a:ea typeface="Georgia" pitchFamily="34" charset="-122"/>
+                <a:cs typeface="Georgia" pitchFamily="34" charset="-120"/>
+              </a:rPr>
+              <a:t>C — Hybrid</a:t>
+            </a:r>
+            <a:pPr algn="l" indent="0" marL="0">
+              <a:lnSpc>
+                <a:spcPts val="1620"/>
+              </a:lnSpc>
+              <a:spcAft>
+                <a:spcPts val="300"/>
+              </a:spcAft>
+              <a:buNone/>
+            </a:pPr>
+            <a:r>
+              <a:rPr lang="en-US" sz="1200" dirty="0">
+                <a:solidFill>
+                  <a:srgbClr val="1A1A1A"/>
+                </a:solidFill>
+                <a:latin typeface="Georgia" pitchFamily="34" charset="0"/>
+                <a:ea typeface="Georgia" pitchFamily="34" charset="-122"/>
+                <a:cs typeface="Georgia" pitchFamily="34" charset="-120"/>
+              </a:rPr>
+              <a:t> — IKS should be referenced briefly in science class as historical context, but not taught as parallel content.</a:t>
+            </a:r>
+            <a:endParaRPr lang="en-US" sz="1200" dirty="0"/>
+          </a:p>
+        </p:txBody>
+      </p:sp>
+      <p:sp>
+        <p:nvSpPr>
+          <p:cNvPr id="7" name="Text 5"/>
+          <p:cNvSpPr/>
+          <p:nvPr/>
+        </p:nvSpPr>
+        <p:spPr>
+          <a:xfrm>
             <a:off x="406301" y="4434929"/>
             <a:ext cx="8498026" cy="213271"/>
           </a:xfrm>
@@ -3748,6 +3950,252 @@
       <p:sp>
         <p:nvSpPr>
           <p:cNvPr id="5" name="Text 3"/>
+          <p:cNvSpPr/>
+          <p:nvPr/>
+        </p:nvSpPr>
+        <p:spPr>
+          <a:xfrm>
+            <a:off x="406301" y="1160413"/>
+            <a:ext cx="8498026" cy="213271"/>
+          </a:xfrm>
+          <a:prstGeom prst="rect">
+            <a:avLst/>
+          </a:prstGeom>
+          <a:noFill/>
+          <a:ln/>
+        </p:spPr>
+        <p:txBody>
+          <a:bodyPr wrap="square" lIns="0" tIns="0" rIns="0" bIns="0" rtlCol="0" anchor="t"/>
+          <a:lstStyle/>
+          <a:p>
+            <a:pPr algn="l" indent="0" marL="0">
+              <a:lnSpc>
+                <a:spcPts val="1680"/>
+              </a:lnSpc>
+              <a:spcBef>
+                <a:spcPts val="300"/>
+              </a:spcBef>
+              <a:spcAft>
+                <a:spcPts val="300"/>
+              </a:spcAft>
+              <a:buNone/>
+            </a:pPr>
+            <a:r>
+              <a:rPr lang="en-US" sz="1200" i="1" dirty="0">
+                <a:solidFill>
+                  <a:srgbClr val="1A1A1A"/>
+                </a:solidFill>
+                <a:latin typeface="Georgia" pitchFamily="34" charset="0"/>
+                <a:ea typeface="Georgia" pitchFamily="34" charset="-122"/>
+                <a:cs typeface="Georgia" pitchFamily="34" charset="-120"/>
+              </a:rPr>
+              <a:t>Each row: Criterion · 4 · 3 · 2 · 1.</a:t>
+            </a:r>
+            <a:endParaRPr lang="en-US" sz="1200" dirty="0"/>
+          </a:p>
+        </p:txBody>
+      </p:sp>
+      <p:sp>
+        <p:nvSpPr>
+          <p:cNvPr id="6" name="Text 4"/>
+          <p:cNvSpPr/>
+          <p:nvPr/>
+        </p:nvSpPr>
+        <p:spPr>
+          <a:xfrm>
+            <a:off x="634901" y="1462534"/>
+            <a:ext cx="8102798" cy="1013222"/>
+          </a:xfrm>
+          <a:prstGeom prst="rect">
+            <a:avLst/>
+          </a:prstGeom>
+          <a:noFill/>
+          <a:ln/>
+        </p:spPr>
+        <p:txBody>
+          <a:bodyPr wrap="square" lIns="0" tIns="0" rIns="0" bIns="0" rtlCol="0" anchor="t"/>
+          <a:lstStyle/>
+          <a:p>
+            <a:pPr algn="l" marL="342900" indent="-342900">
+              <a:lnSpc>
+                <a:spcPts val="1620"/>
+              </a:lnSpc>
+              <a:spcAft>
+                <a:spcPts val="300"/>
+              </a:spcAft>
+              <a:buSzPct val="100000"/>
+              <a:buChar char="•"/>
+            </a:pPr>
+            <a:r>
+              <a:rPr lang="en-US" sz="1200" b="1" dirty="0">
+                <a:solidFill>
+                  <a:srgbClr val="1A1A1A"/>
+                </a:solidFill>
+                <a:latin typeface="Georgia" pitchFamily="34" charset="0"/>
+                <a:ea typeface="Georgia" pitchFamily="34" charset="-122"/>
+                <a:cs typeface="Georgia" pitchFamily="34" charset="-120"/>
+              </a:rPr>
+              <a:t>Position clarity</a:t>
+            </a:r>
+            <a:pPr algn="l" indent="0" marL="0">
+              <a:lnSpc>
+                <a:spcPts val="1620"/>
+              </a:lnSpc>
+              <a:spcAft>
+                <a:spcPts val="300"/>
+              </a:spcAft>
+              <a:buNone/>
+            </a:pPr>
+            <a:r>
+              <a:rPr lang="en-US" sz="1200" dirty="0">
+                <a:solidFill>
+                  <a:srgbClr val="1A1A1A"/>
+                </a:solidFill>
+                <a:latin typeface="Georgia" pitchFamily="34" charset="0"/>
+                <a:ea typeface="Georgia" pitchFamily="34" charset="-122"/>
+                <a:cs typeface="Georgia" pitchFamily="34" charset="-120"/>
+              </a:rPr>
+              <a:t> — Crystal clear with 1-line summary · Clear · Mostly clear · Unclear</a:t>
+            </a:r>
+            <a:endParaRPr lang="en-US" sz="1200" dirty="0"/>
+          </a:p>
+          <a:p>
+            <a:pPr algn="l" marL="342900" indent="-342900">
+              <a:lnSpc>
+                <a:spcPts val="1620"/>
+              </a:lnSpc>
+              <a:spcAft>
+                <a:spcPts val="300"/>
+              </a:spcAft>
+              <a:buSzPct val="100000"/>
+              <a:buChar char="•"/>
+            </a:pPr>
+            <a:r>
+              <a:rPr lang="en-US" sz="1200" b="1" dirty="0">
+                <a:solidFill>
+                  <a:srgbClr val="1A1A1A"/>
+                </a:solidFill>
+                <a:latin typeface="Georgia" pitchFamily="34" charset="0"/>
+                <a:ea typeface="Georgia" pitchFamily="34" charset="-122"/>
+                <a:cs typeface="Georgia" pitchFamily="34" charset="-120"/>
+              </a:rPr>
+              <a:t>Use of evidence</a:t>
+            </a:r>
+            <a:pPr algn="l" indent="0" marL="0">
+              <a:lnSpc>
+                <a:spcPts val="1620"/>
+              </a:lnSpc>
+              <a:spcAft>
+                <a:spcPts val="300"/>
+              </a:spcAft>
+              <a:buNone/>
+            </a:pPr>
+            <a:r>
+              <a:rPr lang="en-US" sz="1200" dirty="0">
+                <a:solidFill>
+                  <a:srgbClr val="1A1A1A"/>
+                </a:solidFill>
+                <a:latin typeface="Georgia" pitchFamily="34" charset="0"/>
+                <a:ea typeface="Georgia" pitchFamily="34" charset="-122"/>
+                <a:cs typeface="Georgia" pitchFamily="34" charset="-120"/>
+              </a:rPr>
+              <a:t> — Cites at least 1 specific source · Cites generally · Vague references · No evidence</a:t>
+            </a:r>
+            <a:endParaRPr lang="en-US" sz="1200" dirty="0"/>
+          </a:p>
+          <a:p>
+            <a:pPr algn="l" marL="342900" indent="-342900">
+              <a:lnSpc>
+                <a:spcPts val="1620"/>
+              </a:lnSpc>
+              <a:spcAft>
+                <a:spcPts val="300"/>
+              </a:spcAft>
+              <a:buSzPct val="100000"/>
+              <a:buChar char="•"/>
+            </a:pPr>
+            <a:r>
+              <a:rPr lang="en-US" sz="1200" b="1" dirty="0">
+                <a:solidFill>
+                  <a:srgbClr val="1A1A1A"/>
+                </a:solidFill>
+                <a:latin typeface="Georgia" pitchFamily="34" charset="0"/>
+                <a:ea typeface="Georgia" pitchFamily="34" charset="-122"/>
+                <a:cs typeface="Georgia" pitchFamily="34" charset="-120"/>
+              </a:rPr>
+              <a:t>Counter-argument</a:t>
+            </a:r>
+            <a:pPr algn="l" indent="0" marL="0">
+              <a:lnSpc>
+                <a:spcPts val="1620"/>
+              </a:lnSpc>
+              <a:spcAft>
+                <a:spcPts val="300"/>
+              </a:spcAft>
+              <a:buNone/>
+            </a:pPr>
+            <a:r>
+              <a:rPr lang="en-US" sz="1200" dirty="0">
+                <a:solidFill>
+                  <a:srgbClr val="1A1A1A"/>
+                </a:solidFill>
+                <a:latin typeface="Georgia" pitchFamily="34" charset="0"/>
+                <a:ea typeface="Georgia" pitchFamily="34" charset="-122"/>
+                <a:cs typeface="Georgia" pitchFamily="34" charset="-120"/>
+              </a:rPr>
+              <a:t> — Steel-mans an opposing view · Acknowledges another view · Mentions another view · Ignores</a:t>
+            </a:r>
+            <a:endParaRPr lang="en-US" sz="1200" dirty="0"/>
+          </a:p>
+          <a:p>
+            <a:pPr algn="l" marL="342900" indent="-342900">
+              <a:lnSpc>
+                <a:spcPts val="1620"/>
+              </a:lnSpc>
+              <a:spcAft>
+                <a:spcPts val="300"/>
+              </a:spcAft>
+              <a:buSzPct val="100000"/>
+              <a:buChar char="•"/>
+            </a:pPr>
+            <a:r>
+              <a:rPr lang="en-US" sz="1200" b="1" dirty="0">
+                <a:solidFill>
+                  <a:srgbClr val="1A1A1A"/>
+                </a:solidFill>
+                <a:latin typeface="Georgia" pitchFamily="34" charset="0"/>
+                <a:ea typeface="Georgia" pitchFamily="34" charset="-122"/>
+                <a:cs typeface="Georgia" pitchFamily="34" charset="-120"/>
+              </a:rPr>
+              <a:t>Listening</a:t>
+            </a:r>
+            <a:pPr algn="l" indent="0" marL="0">
+              <a:lnSpc>
+                <a:spcPts val="1620"/>
+              </a:lnSpc>
+              <a:spcAft>
+                <a:spcPts val="300"/>
+              </a:spcAft>
+              <a:buNone/>
+            </a:pPr>
+            <a:r>
+              <a:rPr lang="en-US" sz="1200" dirty="0">
+                <a:solidFill>
+                  <a:srgbClr val="1A1A1A"/>
+                </a:solidFill>
+                <a:latin typeface="Georgia" pitchFamily="34" charset="0"/>
+                <a:ea typeface="Georgia" pitchFamily="34" charset="-122"/>
+                <a:cs typeface="Georgia" pitchFamily="34" charset="-120"/>
+              </a:rPr>
+              <a:t> — Responds to specific points raised · Responds generally · Sticks to script · Doesn't engage</a:t>
+            </a:r>
+            <a:endParaRPr lang="en-US" sz="1200" dirty="0"/>
+          </a:p>
+        </p:txBody>
+      </p:sp>
+      <p:sp>
+        <p:nvSpPr>
+          <p:cNvPr id="7" name="Text 5"/>
           <p:cNvSpPr/>
           <p:nvPr/>
         </p:nvSpPr>

--- a/exports/pptx/lessons/senior-module-02-panchabhuta/day-07-discussion.pptx
+++ b/exports/pptx/lessons/senior-module-02-panchabhuta/day-07-discussion.pptx
@@ -16,9 +16,12 @@
     <p:sldId id="264" r:id="rId10"/>
     <p:sldId id="265" r:id="rId11"/>
     <p:sldId id="266" r:id="rId12"/>
+    <p:sldId id="267" r:id="rId13"/>
+    <p:sldId id="268" r:id="rId14"/>
+    <p:sldId id="269" r:id="rId15"/>
   </p:sldIdLst>
   <p:notesMasterIdLst>
-    <p:notesMasterId r:id="rId13"/>
+    <p:notesMasterId r:id="rId16"/>
   </p:notesMasterIdLst>
   <p:sldSz cx="9144000" cy="5143500"/>
   <p:notesSz cx="5143500" cy="9144000"/>
@@ -712,6 +715,270 @@
             <a:fld id="{F7021451-1387-4CA6-816F-3879F97B5CBC}" type="slidenum">
               <a:rPr lang="en-US"/>
               <a:t>11</a:t>
+            </a:fld>
+            <a:endParaRPr lang="en-US"/>
+          </a:p>
+        </p:txBody>
+      </p:sp>
+    </p:spTree>
+    <p:extLst>
+      <p:ext uri="{BB962C8B-B14F-4D97-AF65-F5344CB8AC3E}">
+        <p14:creationId xmlns:p14="http://schemas.microsoft.com/office/powerpoint/2010/main" val="1024086991"/>
+      </p:ext>
+    </p:extLst>
+  </p:cSld>
+  <p:clrMapOvr>
+    <a:masterClrMapping/>
+  </p:clrMapOvr>
+</p:notes>
+</file>
+
+<file path=ppt/notesSlides/notesSlide12.xml><?xml version="1.0" encoding="utf-8"?>
+<p:notes xmlns:a="http://schemas.openxmlformats.org/drawingml/2006/main" xmlns:r="http://schemas.openxmlformats.org/officeDocument/2006/relationships" xmlns:p="http://schemas.openxmlformats.org/presentationml/2006/main">
+  <p:cSld>
+    <p:spTree>
+      <p:nvGrpSpPr>
+        <p:cNvPr id="1" name=""/>
+        <p:cNvGrpSpPr/>
+        <p:nvPr/>
+      </p:nvGrpSpPr>
+      <p:grpSpPr>
+        <a:xfrm>
+          <a:off x="0" y="0"/>
+          <a:ext cx="0" cy="0"/>
+          <a:chOff x="0" y="0"/>
+          <a:chExt cx="0" cy="0"/>
+        </a:xfrm>
+      </p:grpSpPr>
+      <p:sp>
+        <p:nvSpPr>
+          <p:cNvPr id="2" name="Slide Image Placeholder 1"/>
+          <p:cNvSpPr>
+            <a:spLocks noGrp="1" noRot="1" noChangeAspect="1"/>
+          </p:cNvSpPr>
+          <p:nvPr>
+            <p:ph type="sldImg"/>
+          </p:nvPr>
+        </p:nvSpPr>
+        <p:spPr/>
+      </p:sp>
+      <p:sp>
+        <p:nvSpPr>
+          <p:cNvPr id="3" name="Notes Placeholder 2"/>
+          <p:cNvSpPr>
+            <a:spLocks noGrp="1"/>
+          </p:cNvSpPr>
+          <p:nvPr>
+            <p:ph type="body" idx="1"/>
+          </p:nvPr>
+        </p:nvSpPr>
+        <p:spPr/>
+        <p:txBody>
+          <a:bodyPr/>
+          <a:lstStyle/>
+          <a:p>
+            <a:r>
+              <a:rPr lang="en-US" dirty="0"/>
+              <a:t/>
+            </a:r>
+            <a:endParaRPr lang="en-US" dirty="0"/>
+          </a:p>
+        </p:txBody>
+      </p:sp>
+      <p:sp>
+        <p:nvSpPr>
+          <p:cNvPr id="4" name="Slide Number Placeholder 3"/>
+          <p:cNvSpPr>
+            <a:spLocks noGrp="1"/>
+          </p:cNvSpPr>
+          <p:nvPr>
+            <p:ph type="sldNum" sz="quarter" idx="10"/>
+          </p:nvPr>
+        </p:nvSpPr>
+        <p:spPr/>
+        <p:txBody>
+          <a:bodyPr/>
+          <a:lstStyle/>
+          <a:p>
+            <a:fld id="{F7021451-1387-4CA6-816F-3879F97B5CBC}" type="slidenum">
+              <a:rPr lang="en-US"/>
+              <a:t>12</a:t>
+            </a:fld>
+            <a:endParaRPr lang="en-US"/>
+          </a:p>
+        </p:txBody>
+      </p:sp>
+    </p:spTree>
+    <p:extLst>
+      <p:ext uri="{BB962C8B-B14F-4D97-AF65-F5344CB8AC3E}">
+        <p14:creationId xmlns:p14="http://schemas.microsoft.com/office/powerpoint/2010/main" val="1024086991"/>
+      </p:ext>
+    </p:extLst>
+  </p:cSld>
+  <p:clrMapOvr>
+    <a:masterClrMapping/>
+  </p:clrMapOvr>
+</p:notes>
+</file>
+
+<file path=ppt/notesSlides/notesSlide13.xml><?xml version="1.0" encoding="utf-8"?>
+<p:notes xmlns:a="http://schemas.openxmlformats.org/drawingml/2006/main" xmlns:r="http://schemas.openxmlformats.org/officeDocument/2006/relationships" xmlns:p="http://schemas.openxmlformats.org/presentationml/2006/main">
+  <p:cSld>
+    <p:spTree>
+      <p:nvGrpSpPr>
+        <p:cNvPr id="1" name=""/>
+        <p:cNvGrpSpPr/>
+        <p:nvPr/>
+      </p:nvGrpSpPr>
+      <p:grpSpPr>
+        <a:xfrm>
+          <a:off x="0" y="0"/>
+          <a:ext cx="0" cy="0"/>
+          <a:chOff x="0" y="0"/>
+          <a:chExt cx="0" cy="0"/>
+        </a:xfrm>
+      </p:grpSpPr>
+      <p:sp>
+        <p:nvSpPr>
+          <p:cNvPr id="2" name="Slide Image Placeholder 1"/>
+          <p:cNvSpPr>
+            <a:spLocks noGrp="1" noRot="1" noChangeAspect="1"/>
+          </p:cNvSpPr>
+          <p:nvPr>
+            <p:ph type="sldImg"/>
+          </p:nvPr>
+        </p:nvSpPr>
+        <p:spPr/>
+      </p:sp>
+      <p:sp>
+        <p:nvSpPr>
+          <p:cNvPr id="3" name="Notes Placeholder 2"/>
+          <p:cNvSpPr>
+            <a:spLocks noGrp="1"/>
+          </p:cNvSpPr>
+          <p:nvPr>
+            <p:ph type="body" idx="1"/>
+          </p:nvPr>
+        </p:nvSpPr>
+        <p:spPr/>
+        <p:txBody>
+          <a:bodyPr/>
+          <a:lstStyle/>
+          <a:p>
+            <a:r>
+              <a:rPr lang="en-US" dirty="0"/>
+              <a:t/>
+            </a:r>
+            <a:endParaRPr lang="en-US" dirty="0"/>
+          </a:p>
+        </p:txBody>
+      </p:sp>
+      <p:sp>
+        <p:nvSpPr>
+          <p:cNvPr id="4" name="Slide Number Placeholder 3"/>
+          <p:cNvSpPr>
+            <a:spLocks noGrp="1"/>
+          </p:cNvSpPr>
+          <p:nvPr>
+            <p:ph type="sldNum" sz="quarter" idx="10"/>
+          </p:nvPr>
+        </p:nvSpPr>
+        <p:spPr/>
+        <p:txBody>
+          <a:bodyPr/>
+          <a:lstStyle/>
+          <a:p>
+            <a:fld id="{F7021451-1387-4CA6-816F-3879F97B5CBC}" type="slidenum">
+              <a:rPr lang="en-US"/>
+              <a:t>13</a:t>
+            </a:fld>
+            <a:endParaRPr lang="en-US"/>
+          </a:p>
+        </p:txBody>
+      </p:sp>
+    </p:spTree>
+    <p:extLst>
+      <p:ext uri="{BB962C8B-B14F-4D97-AF65-F5344CB8AC3E}">
+        <p14:creationId xmlns:p14="http://schemas.microsoft.com/office/powerpoint/2010/main" val="1024086991"/>
+      </p:ext>
+    </p:extLst>
+  </p:cSld>
+  <p:clrMapOvr>
+    <a:masterClrMapping/>
+  </p:clrMapOvr>
+</p:notes>
+</file>
+
+<file path=ppt/notesSlides/notesSlide14.xml><?xml version="1.0" encoding="utf-8"?>
+<p:notes xmlns:a="http://schemas.openxmlformats.org/drawingml/2006/main" xmlns:r="http://schemas.openxmlformats.org/officeDocument/2006/relationships" xmlns:p="http://schemas.openxmlformats.org/presentationml/2006/main">
+  <p:cSld>
+    <p:spTree>
+      <p:nvGrpSpPr>
+        <p:cNvPr id="1" name=""/>
+        <p:cNvGrpSpPr/>
+        <p:nvPr/>
+      </p:nvGrpSpPr>
+      <p:grpSpPr>
+        <a:xfrm>
+          <a:off x="0" y="0"/>
+          <a:ext cx="0" cy="0"/>
+          <a:chOff x="0" y="0"/>
+          <a:chExt cx="0" cy="0"/>
+        </a:xfrm>
+      </p:grpSpPr>
+      <p:sp>
+        <p:nvSpPr>
+          <p:cNvPr id="2" name="Slide Image Placeholder 1"/>
+          <p:cNvSpPr>
+            <a:spLocks noGrp="1" noRot="1" noChangeAspect="1"/>
+          </p:cNvSpPr>
+          <p:nvPr>
+            <p:ph type="sldImg"/>
+          </p:nvPr>
+        </p:nvSpPr>
+        <p:spPr/>
+      </p:sp>
+      <p:sp>
+        <p:nvSpPr>
+          <p:cNvPr id="3" name="Notes Placeholder 2"/>
+          <p:cNvSpPr>
+            <a:spLocks noGrp="1"/>
+          </p:cNvSpPr>
+          <p:nvPr>
+            <p:ph type="body" idx="1"/>
+          </p:nvPr>
+        </p:nvSpPr>
+        <p:spPr/>
+        <p:txBody>
+          <a:bodyPr/>
+          <a:lstStyle/>
+          <a:p>
+            <a:r>
+              <a:rPr lang="en-US" dirty="0"/>
+              <a:t/>
+            </a:r>
+            <a:endParaRPr lang="en-US" dirty="0"/>
+          </a:p>
+        </p:txBody>
+      </p:sp>
+      <p:sp>
+        <p:nvSpPr>
+          <p:cNvPr id="4" name="Slide Number Placeholder 3"/>
+          <p:cNvSpPr>
+            <a:spLocks noGrp="1"/>
+          </p:cNvSpPr>
+          <p:nvPr>
+            <p:ph type="sldNum" sz="quarter" idx="10"/>
+          </p:nvPr>
+        </p:nvSpPr>
+        <p:spPr/>
+        <p:txBody>
+          <a:bodyPr/>
+          <a:lstStyle/>
+          <a:p>
+            <a:fld id="{F7021451-1387-4CA6-816F-3879F97B5CBC}" type="slidenum">
+              <a:rPr lang="en-US"/>
+              <a:t>14</a:t>
             </a:fld>
             <a:endParaRPr lang="en-US"/>
           </a:p>
@@ -1965,102 +2232,6 @@
         </p:nvSpPr>
         <p:spPr>
           <a:xfrm>
-            <a:off x="406301" y="1223963"/>
-            <a:ext cx="8498026" cy="274290"/>
-          </a:xfrm>
-          <a:prstGeom prst="rect">
-            <a:avLst/>
-          </a:prstGeom>
-          <a:noFill/>
-          <a:ln/>
-        </p:spPr>
-        <p:txBody>
-          <a:bodyPr wrap="square" lIns="0" tIns="0" rIns="0" bIns="0" rtlCol="0" anchor="t"/>
-          <a:lstStyle/>
-          <a:p>
-            <a:pPr algn="l" indent="0" marL="0">
-              <a:lnSpc>
-                <a:spcPts val="2160"/>
-              </a:lnSpc>
-              <a:spcBef>
-                <a:spcPts val="600"/>
-              </a:spcBef>
-              <a:spcAft>
-                <a:spcPts val="800"/>
-              </a:spcAft>
-              <a:buNone/>
-            </a:pPr>
-            <a:r>
-              <a:rPr lang="en-US" sz="1800" b="1" dirty="0">
-                <a:solidFill>
-                  <a:srgbClr val="997929"/>
-                </a:solidFill>
-                <a:latin typeface="Times New Roman" pitchFamily="34" charset="0"/>
-                <a:ea typeface="Times New Roman" pitchFamily="34" charset="-122"/>
-                <a:cs typeface="Times New Roman" pitchFamily="34" charset="-120"/>
-              </a:rPr>
-              <a:t>Learning objective</a:t>
-            </a:r>
-            <a:endParaRPr lang="en-US" sz="1800" dirty="0"/>
-          </a:p>
-        </p:txBody>
-      </p:sp>
-      <p:sp>
-        <p:nvSpPr>
-          <p:cNvPr id="6" name="Text 4"/>
-          <p:cNvSpPr/>
-          <p:nvPr/>
-        </p:nvSpPr>
-        <p:spPr>
-          <a:xfrm>
-            <a:off x="406301" y="1637854"/>
-            <a:ext cx="8498026" cy="426541"/>
-          </a:xfrm>
-          <a:prstGeom prst="rect">
-            <a:avLst/>
-          </a:prstGeom>
-          <a:noFill/>
-          <a:ln/>
-        </p:spPr>
-        <p:txBody>
-          <a:bodyPr wrap="square" lIns="0" tIns="0" rIns="0" bIns="0" rtlCol="0" anchor="t"/>
-          <a:lstStyle/>
-          <a:p>
-            <a:pPr algn="l" indent="0" marL="0">
-              <a:lnSpc>
-                <a:spcPts val="1680"/>
-              </a:lnSpc>
-              <a:spcBef>
-                <a:spcPts val="300"/>
-              </a:spcBef>
-              <a:spcAft>
-                <a:spcPts val="300"/>
-              </a:spcAft>
-              <a:buNone/>
-            </a:pPr>
-            <a:r>
-              <a:rPr lang="en-US" sz="1200" dirty="0">
-                <a:solidFill>
-                  <a:srgbClr val="1A1A1A"/>
-                </a:solidFill>
-                <a:latin typeface="Georgia" pitchFamily="34" charset="0"/>
-                <a:ea typeface="Georgia" pitchFamily="34" charset="-122"/>
-                <a:cs typeface="Georgia" pitchFamily="34" charset="-120"/>
-              </a:rPr>
-              <a:t>Students articulate and defend a position on whether classical Indian intellectual frameworks should be taught in mainstream science class, with at least one citation and one steel-manned counter-argument.</a:t>
-            </a:r>
-            <a:endParaRPr lang="en-US" sz="1200" dirty="0"/>
-          </a:p>
-        </p:txBody>
-      </p:sp>
-      <p:sp>
-        <p:nvSpPr>
-          <p:cNvPr id="7" name="Text 5"/>
-          <p:cNvSpPr/>
-          <p:nvPr/>
-        </p:nvSpPr>
-        <p:spPr>
-          <a:xfrm>
             <a:off x="406301" y="4434929"/>
             <a:ext cx="8498026" cy="213271"/>
           </a:xfrm>
@@ -2205,7 +2376,7 @@
                 <a:ea typeface="Times New Roman" pitchFamily="34" charset="-122"/>
                 <a:cs typeface="Times New Roman" pitchFamily="34" charset="-120"/>
               </a:rPr>
-              <a:t>Teacher notes</a:t>
+              <a:t>Oral assessment (during the debate) (cont.)</a:t>
             </a:r>
             <a:endParaRPr lang="en-US" sz="1800" dirty="0"/>
           </a:p>
@@ -2219,8 +2390,8 @@
         </p:nvSpPr>
         <p:spPr>
           <a:xfrm>
-            <a:off x="406301" y="870942"/>
-            <a:ext cx="8498026" cy="639812"/>
+            <a:off x="634901" y="883593"/>
+            <a:ext cx="8102798" cy="1013222"/>
           </a:xfrm>
           <a:prstGeom prst="rect">
             <a:avLst/>
@@ -2232,13 +2403,31 @@
           <a:bodyPr wrap="square" lIns="0" tIns="0" rIns="0" bIns="0" rtlCol="0" anchor="t"/>
           <a:lstStyle/>
           <a:p>
+            <a:pPr algn="l" marL="342900" indent="-342900">
+              <a:lnSpc>
+                <a:spcPts val="1620"/>
+              </a:lnSpc>
+              <a:spcAft>
+                <a:spcPts val="300"/>
+              </a:spcAft>
+              <a:buSzPct val="100000"/>
+              <a:buChar char="•"/>
+            </a:pPr>
+            <a:r>
+              <a:rPr lang="en-US" sz="1200" b="1" dirty="0">
+                <a:solidFill>
+                  <a:srgbClr val="1A1A1A"/>
+                </a:solidFill>
+                <a:latin typeface="Georgia" pitchFamily="34" charset="0"/>
+                <a:ea typeface="Georgia" pitchFamily="34" charset="-122"/>
+                <a:cs typeface="Georgia" pitchFamily="34" charset="-120"/>
+              </a:rPr>
+              <a:t>Position clarity</a:t>
+            </a:r>
             <a:pPr algn="l" indent="0" marL="0">
               <a:lnSpc>
-                <a:spcPts val="1680"/>
-              </a:lnSpc>
-              <a:spcBef>
-                <a:spcPts val="300"/>
-              </a:spcBef>
+                <a:spcPts val="1620"/>
+              </a:lnSpc>
               <a:spcAft>
                 <a:spcPts val="300"/>
               </a:spcAft>
@@ -2253,38 +2442,80 @@
                 <a:ea typeface="Georgia" pitchFamily="34" charset="-122"/>
                 <a:cs typeface="Georgia" pitchFamily="34" charset="-120"/>
               </a:rPr>
-              <a:t>– This is where some students discover they don't really know what they think. That's the point. – If the debate gets heated, slow it down: </a:t>
+              <a:t> — Crystal clear with 1-line summary · Clear · Mostly clear · Unclear</a:t>
+            </a:r>
+            <a:endParaRPr lang="en-US" sz="1200" dirty="0"/>
+          </a:p>
+          <a:p>
+            <a:pPr algn="l" marL="342900" indent="-342900">
+              <a:lnSpc>
+                <a:spcPts val="1620"/>
+              </a:lnSpc>
+              <a:spcAft>
+                <a:spcPts val="300"/>
+              </a:spcAft>
+              <a:buSzPct val="100000"/>
+              <a:buChar char="•"/>
+            </a:pPr>
+            <a:r>
+              <a:rPr lang="en-US" sz="1200" b="1" dirty="0">
+                <a:solidFill>
+                  <a:srgbClr val="1A1A1A"/>
+                </a:solidFill>
+                <a:latin typeface="Georgia" pitchFamily="34" charset="0"/>
+                <a:ea typeface="Georgia" pitchFamily="34" charset="-122"/>
+                <a:cs typeface="Georgia" pitchFamily="34" charset="-120"/>
+              </a:rPr>
+              <a:t>Use of evidence</a:t>
             </a:r>
             <a:pPr algn="l" indent="0" marL="0">
               <a:lnSpc>
-                <a:spcPts val="1680"/>
-              </a:lnSpc>
-              <a:spcBef>
-                <a:spcPts val="300"/>
-              </a:spcBef>
-              <a:spcAft>
-                <a:spcPts val="300"/>
-              </a:spcAft>
-              <a:buNone/>
-            </a:pPr>
-            <a:r>
-              <a:rPr lang="en-US" sz="1200" i="1" dirty="0">
-                <a:solidFill>
-                  <a:srgbClr val="1A1A1A"/>
-                </a:solidFill>
-                <a:latin typeface="Georgia" pitchFamily="34" charset="0"/>
-                <a:ea typeface="Georgia" pitchFamily="34" charset="-122"/>
-                <a:cs typeface="Georgia" pitchFamily="34" charset="-120"/>
-              </a:rPr>
-              <a:t>"Steel-man the other side. What's their best argument?"</a:t>
+                <a:spcPts val="1620"/>
+              </a:lnSpc>
+              <a:spcAft>
+                <a:spcPts val="300"/>
+              </a:spcAft>
+              <a:buNone/>
+            </a:pPr>
+            <a:r>
+              <a:rPr lang="en-US" sz="1200" dirty="0">
+                <a:solidFill>
+                  <a:srgbClr val="1A1A1A"/>
+                </a:solidFill>
+                <a:latin typeface="Georgia" pitchFamily="34" charset="0"/>
+                <a:ea typeface="Georgia" pitchFamily="34" charset="-122"/>
+                <a:cs typeface="Georgia" pitchFamily="34" charset="-120"/>
+              </a:rPr>
+              <a:t> — Cites at least 1 specific source · Cites generally · Vague references · No evidence</a:t>
+            </a:r>
+            <a:endParaRPr lang="en-US" sz="1200" dirty="0"/>
+          </a:p>
+          <a:p>
+            <a:pPr algn="l" marL="342900" indent="-342900">
+              <a:lnSpc>
+                <a:spcPts val="1620"/>
+              </a:lnSpc>
+              <a:spcAft>
+                <a:spcPts val="300"/>
+              </a:spcAft>
+              <a:buSzPct val="100000"/>
+              <a:buChar char="•"/>
+            </a:pPr>
+            <a:r>
+              <a:rPr lang="en-US" sz="1200" b="1" dirty="0">
+                <a:solidFill>
+                  <a:srgbClr val="1A1A1A"/>
+                </a:solidFill>
+                <a:latin typeface="Georgia" pitchFamily="34" charset="0"/>
+                <a:ea typeface="Georgia" pitchFamily="34" charset="-122"/>
+                <a:cs typeface="Georgia" pitchFamily="34" charset="-120"/>
+              </a:rPr>
+              <a:t>Counter-argument</a:t>
             </a:r>
             <a:pPr algn="l" indent="0" marL="0">
               <a:lnSpc>
-                <a:spcPts val="1680"/>
-              </a:lnSpc>
-              <a:spcBef>
-                <a:spcPts val="300"/>
-              </a:spcBef>
+                <a:spcPts val="1620"/>
+              </a:lnSpc>
               <a:spcAft>
                 <a:spcPts val="300"/>
               </a:spcAft>
@@ -2299,7 +2530,51 @@
                 <a:ea typeface="Georgia" pitchFamily="34" charset="-122"/>
                 <a:cs typeface="Georgia" pitchFamily="34" charset="-120"/>
               </a:rPr>
-              <a:t> – The Day 7 oral grade flows into the project rubric — not as a separate score.</a:t>
+              <a:t> — Steel-mans an opposing view · Acknowledges another view · Mentions another view · Ignores</a:t>
+            </a:r>
+            <a:endParaRPr lang="en-US" sz="1200" dirty="0"/>
+          </a:p>
+          <a:p>
+            <a:pPr algn="l" marL="342900" indent="-342900">
+              <a:lnSpc>
+                <a:spcPts val="1620"/>
+              </a:lnSpc>
+              <a:spcAft>
+                <a:spcPts val="300"/>
+              </a:spcAft>
+              <a:buSzPct val="100000"/>
+              <a:buChar char="•"/>
+            </a:pPr>
+            <a:r>
+              <a:rPr lang="en-US" sz="1200" b="1" dirty="0">
+                <a:solidFill>
+                  <a:srgbClr val="1A1A1A"/>
+                </a:solidFill>
+                <a:latin typeface="Georgia" pitchFamily="34" charset="0"/>
+                <a:ea typeface="Georgia" pitchFamily="34" charset="-122"/>
+                <a:cs typeface="Georgia" pitchFamily="34" charset="-120"/>
+              </a:rPr>
+              <a:t>Listening</a:t>
+            </a:r>
+            <a:pPr algn="l" indent="0" marL="0">
+              <a:lnSpc>
+                <a:spcPts val="1620"/>
+              </a:lnSpc>
+              <a:spcAft>
+                <a:spcPts val="300"/>
+              </a:spcAft>
+              <a:buNone/>
+            </a:pPr>
+            <a:r>
+              <a:rPr lang="en-US" sz="1200" dirty="0">
+                <a:solidFill>
+                  <a:srgbClr val="1A1A1A"/>
+                </a:solidFill>
+                <a:latin typeface="Georgia" pitchFamily="34" charset="0"/>
+                <a:ea typeface="Georgia" pitchFamily="34" charset="-122"/>
+                <a:cs typeface="Georgia" pitchFamily="34" charset="-120"/>
+              </a:rPr>
+              <a:t> — Responds to specific points raised · Responds generally · Sticks to script · Doesn't engage</a:t>
             </a:r>
             <a:endParaRPr lang="en-US" sz="1200" dirty="0"/>
           </a:p>
@@ -2457,7 +2732,7 @@
                 <a:ea typeface="Times New Roman" pitchFamily="34" charset="-122"/>
                 <a:cs typeface="Times New Roman" pitchFamily="34" charset="-120"/>
               </a:rPr>
-              <a:t>Citation(s) used</a:t>
+              <a:t>Wrap-up (10 min)</a:t>
             </a:r>
             <a:endParaRPr lang="en-US" sz="1800" dirty="0"/>
           </a:p>
@@ -2471,8 +2746,8 @@
         </p:nvSpPr>
         <p:spPr>
           <a:xfrm>
-            <a:off x="406301" y="870942"/>
-            <a:ext cx="8498026" cy="222796"/>
+            <a:off x="634901" y="883593"/>
+            <a:ext cx="8102798" cy="769441"/>
           </a:xfrm>
           <a:prstGeom prst="rect">
             <a:avLst/>
@@ -2484,8 +2759,182 @@
           <a:bodyPr wrap="square" lIns="0" tIns="0" rIns="0" bIns="0" rtlCol="0" anchor="t"/>
           <a:lstStyle/>
           <a:p>
+            <a:pPr algn="l" marL="342900" indent="-342900">
+              <a:lnSpc>
+                <a:spcPts val="1620"/>
+              </a:lnSpc>
+              <a:spcAft>
+                <a:spcPts val="300"/>
+              </a:spcAft>
+              <a:buSzPct val="100000"/>
+              <a:buChar char="•"/>
+            </a:pPr>
+            <a:r>
+              <a:rPr lang="en-US" sz="1200" dirty="0">
+                <a:solidFill>
+                  <a:srgbClr val="1A1A1A"/>
+                </a:solidFill>
+                <a:latin typeface="Georgia" pitchFamily="34" charset="0"/>
+                <a:ea typeface="Georgia" pitchFamily="34" charset="-122"/>
+                <a:cs typeface="Georgia" pitchFamily="34" charset="-120"/>
+              </a:rPr>
+              <a:t>Take 3 student reflections: </a:t>
+            </a:r>
             <a:pPr algn="l" indent="0" marL="0">
               <a:lnSpc>
+                <a:spcPts val="1620"/>
+              </a:lnSpc>
+              <a:spcAft>
+                <a:spcPts val="300"/>
+              </a:spcAft>
+              <a:buNone/>
+            </a:pPr>
+            <a:r>
+              <a:rPr lang="en-US" sz="1200" i="1" dirty="0">
+                <a:solidFill>
+                  <a:srgbClr val="1A1A1A"/>
+                </a:solidFill>
+                <a:latin typeface="Georgia" pitchFamily="34" charset="0"/>
+                <a:ea typeface="Georgia" pitchFamily="34" charset="-122"/>
+                <a:cs typeface="Georgia" pitchFamily="34" charset="-120"/>
+              </a:rPr>
+              <a:t>"Did anyone's mind change during the debate?"</a:t>
+            </a:r>
+            <a:endParaRPr lang="en-US" sz="1200" dirty="0"/>
+          </a:p>
+          <a:p>
+            <a:pPr algn="l" marL="342900" indent="-342900">
+              <a:lnSpc>
+                <a:spcPts val="1620"/>
+              </a:lnSpc>
+              <a:spcAft>
+                <a:spcPts val="300"/>
+              </a:spcAft>
+              <a:buSzPct val="100000"/>
+              <a:buChar char="•"/>
+            </a:pPr>
+            <a:r>
+              <a:rPr lang="en-US" sz="1200" dirty="0">
+                <a:solidFill>
+                  <a:srgbClr val="1A1A1A"/>
+                </a:solidFill>
+                <a:latin typeface="Georgia" pitchFamily="34" charset="0"/>
+                <a:ea typeface="Georgia" pitchFamily="34" charset="-122"/>
+                <a:cs typeface="Georgia" pitchFamily="34" charset="-120"/>
+              </a:rPr>
+              <a:t>Note: the goal is not to "win" but to </a:t>
+            </a:r>
+            <a:pPr algn="l" indent="0" marL="0">
+              <a:lnSpc>
+                <a:spcPts val="1620"/>
+              </a:lnSpc>
+              <a:spcAft>
+                <a:spcPts val="300"/>
+              </a:spcAft>
+              <a:buNone/>
+            </a:pPr>
+            <a:r>
+              <a:rPr lang="en-US" sz="1200" i="1" dirty="0">
+                <a:solidFill>
+                  <a:srgbClr val="1A1A1A"/>
+                </a:solidFill>
+                <a:latin typeface="Georgia" pitchFamily="34" charset="0"/>
+                <a:ea typeface="Georgia" pitchFamily="34" charset="-122"/>
+                <a:cs typeface="Georgia" pitchFamily="34" charset="-120"/>
+              </a:rPr>
+              <a:t>understand the strongest version of each position</a:t>
+            </a:r>
+            <a:pPr algn="l" indent="0" marL="0">
+              <a:lnSpc>
+                <a:spcPts val="1620"/>
+              </a:lnSpc>
+              <a:spcAft>
+                <a:spcPts val="300"/>
+              </a:spcAft>
+              <a:buNone/>
+            </a:pPr>
+            <a:r>
+              <a:rPr lang="en-US" sz="1200" dirty="0">
+                <a:solidFill>
+                  <a:srgbClr val="1A1A1A"/>
+                </a:solidFill>
+                <a:latin typeface="Georgia" pitchFamily="34" charset="0"/>
+                <a:ea typeface="Georgia" pitchFamily="34" charset="-122"/>
+                <a:cs typeface="Georgia" pitchFamily="34" charset="-120"/>
+              </a:rPr>
+              <a:t>.</a:t>
+            </a:r>
+            <a:endParaRPr lang="en-US" sz="1200" dirty="0"/>
+          </a:p>
+          <a:p>
+            <a:pPr algn="l" marL="342900" indent="-342900">
+              <a:lnSpc>
+                <a:spcPts val="1620"/>
+              </a:lnSpc>
+              <a:spcAft>
+                <a:spcPts val="300"/>
+              </a:spcAft>
+              <a:buSzPct val="100000"/>
+              <a:buChar char="•"/>
+            </a:pPr>
+            <a:r>
+              <a:rPr lang="en-US" sz="1200" dirty="0">
+                <a:solidFill>
+                  <a:srgbClr val="1A1A1A"/>
+                </a:solidFill>
+                <a:latin typeface="Georgia" pitchFamily="34" charset="0"/>
+                <a:ea typeface="Georgia" pitchFamily="34" charset="-122"/>
+                <a:cs typeface="Georgia" pitchFamily="34" charset="-120"/>
+              </a:rPr>
+              <a:t>Preview Day 8: </a:t>
+            </a:r>
+            <a:pPr algn="l" indent="0" marL="0">
+              <a:lnSpc>
+                <a:spcPts val="1620"/>
+              </a:lnSpc>
+              <a:spcAft>
+                <a:spcPts val="300"/>
+              </a:spcAft>
+              <a:buNone/>
+            </a:pPr>
+            <a:r>
+              <a:rPr lang="en-US" sz="1200" i="1" dirty="0">
+                <a:solidFill>
+                  <a:srgbClr val="1A1A1A"/>
+                </a:solidFill>
+                <a:latin typeface="Georgia" pitchFamily="34" charset="0"/>
+                <a:ea typeface="Georgia" pitchFamily="34" charset="-122"/>
+                <a:cs typeface="Georgia" pitchFamily="34" charset="-120"/>
+              </a:rPr>
+              <a:t>"Tomorrow you start your paper. Use this debate to sharpen your own thesis."</a:t>
+            </a:r>
+            <a:endParaRPr lang="en-US" sz="1200" dirty="0"/>
+          </a:p>
+        </p:txBody>
+      </p:sp>
+      <p:sp>
+        <p:nvSpPr>
+          <p:cNvPr id="5" name="Text 3"/>
+          <p:cNvSpPr/>
+          <p:nvPr/>
+        </p:nvSpPr>
+        <p:spPr>
+          <a:xfrm>
+            <a:off x="406301" y="4434929"/>
+            <a:ext cx="8498026" cy="213271"/>
+          </a:xfrm>
+          <a:prstGeom prst="rect">
+            <a:avLst/>
+          </a:prstGeom>
+          <a:noFill/>
+          <a:ln/>
+        </p:spPr>
+        <p:txBody>
+          <a:bodyPr wrap="square" lIns="0" tIns="0" rIns="0" bIns="0" rtlCol="0" anchor="t"/>
+          <a:lstStyle/>
+          <a:p>
+            <a:pPr algn="l" indent="0" marL="0">
+              <a:lnSpc>
                 <a:spcPts val="1680"/>
               </a:lnSpc>
               <a:spcBef>
@@ -2505,10 +2954,255 @@
                 <a:ea typeface="Georgia" pitchFamily="34" charset="-122"/>
                 <a:cs typeface="Georgia" pitchFamily="34" charset="-120"/>
               </a:rPr>
-              <a:t>– All sources from </a:t>
-            </a:r>
+              <a:t>Senior ·  · IKS Curriculum</a:t>
+            </a:r>
+            <a:endParaRPr lang="en-US" sz="1200" dirty="0"/>
+          </a:p>
+        </p:txBody>
+      </p:sp>
+    </p:spTree>
+  </p:cSld>
+  <p:clrMapOvr>
+    <a:masterClrMapping/>
+  </p:clrMapOvr>
+</p:sld>
+</file>
+
+<file path=ppt/slides/slide12.xml><?xml version="1.0" encoding="utf-8"?>
+<p:sld xmlns:a="http://schemas.openxmlformats.org/drawingml/2006/main" xmlns:r="http://schemas.openxmlformats.org/officeDocument/2006/relationships" xmlns:p="http://schemas.openxmlformats.org/presentationml/2006/main">
+  <p:cSld name="Slide 12">
+    <p:bg>
+      <p:bgPr>
+        <a:solidFill>
+          <a:srgbClr val="FAF7F2"/>
+        </a:solidFill>
+      </p:bgPr>
+    </p:bg>
+    <p:spTree>
+      <p:nvGrpSpPr>
+        <p:cNvPr id="1" name=""/>
+        <p:cNvGrpSpPr/>
+        <p:nvPr/>
+      </p:nvGrpSpPr>
+      <p:grpSpPr>
+        <a:xfrm>
+          <a:off x="0" y="0"/>
+          <a:ext cx="0" cy="0"/>
+          <a:chOff x="0" y="0"/>
+          <a:chExt cx="0" cy="0"/>
+        </a:xfrm>
+      </p:grpSpPr>
+      <p:sp>
+        <p:nvSpPr>
+          <p:cNvPr id="2" name="Text 0"/>
+          <p:cNvSpPr/>
+          <p:nvPr/>
+        </p:nvSpPr>
+        <p:spPr>
+          <a:xfrm>
+            <a:off x="0" y="0"/>
+            <a:ext cx="9144000" cy="101501"/>
+          </a:xfrm>
+          <a:prstGeom prst="rect">
+            <a:avLst/>
+          </a:prstGeom>
+          <a:solidFill>
+            <a:srgbClr val="5D1D2E"/>
+          </a:solidFill>
+          <a:ln/>
+        </p:spPr>
+        <p:txBody>
+          <a:bodyPr wrap="square" rtlCol="0" anchor="ctr"/>
+          <a:lstStyle/>
+          <a:p>
+            <a:pPr indent="0" marL="0">
+              <a:buNone/>
+            </a:pPr>
+            <a:endParaRPr lang="en-US" dirty="0"/>
+          </a:p>
+        </p:txBody>
+      </p:sp>
+      <p:sp>
+        <p:nvSpPr>
+          <p:cNvPr id="3" name="Text 1"/>
+          <p:cNvSpPr/>
+          <p:nvPr/>
+        </p:nvSpPr>
+        <p:spPr>
+          <a:xfrm>
+            <a:off x="406301" y="457051"/>
+            <a:ext cx="8498026" cy="274290"/>
+          </a:xfrm>
+          <a:prstGeom prst="rect">
+            <a:avLst/>
+          </a:prstGeom>
+          <a:noFill/>
+          <a:ln/>
+        </p:spPr>
+        <p:txBody>
+          <a:bodyPr wrap="square" lIns="0" tIns="0" rIns="0" bIns="0" rtlCol="0" anchor="t"/>
+          <a:lstStyle/>
+          <a:p>
             <a:pPr algn="l" indent="0" marL="0">
               <a:lnSpc>
+                <a:spcPts val="2160"/>
+              </a:lnSpc>
+              <a:spcBef>
+                <a:spcPts val="600"/>
+              </a:spcBef>
+              <a:spcAft>
+                <a:spcPts val="800"/>
+              </a:spcAft>
+              <a:buNone/>
+            </a:pPr>
+            <a:r>
+              <a:rPr lang="en-US" sz="1800" b="1" dirty="0">
+                <a:solidFill>
+                  <a:srgbClr val="997929"/>
+                </a:solidFill>
+                <a:latin typeface="Times New Roman" pitchFamily="34" charset="0"/>
+                <a:ea typeface="Times New Roman" pitchFamily="34" charset="-122"/>
+                <a:cs typeface="Times New Roman" pitchFamily="34" charset="-120"/>
+              </a:rPr>
+              <a:t>Differentiation</a:t>
+            </a:r>
+            <a:endParaRPr lang="en-US" sz="1800" dirty="0"/>
+          </a:p>
+        </p:txBody>
+      </p:sp>
+      <p:sp>
+        <p:nvSpPr>
+          <p:cNvPr id="4" name="Text 2"/>
+          <p:cNvSpPr/>
+          <p:nvPr/>
+        </p:nvSpPr>
+        <p:spPr>
+          <a:xfrm>
+            <a:off x="634901" y="883593"/>
+            <a:ext cx="8102798" cy="525661"/>
+          </a:xfrm>
+          <a:prstGeom prst="rect">
+            <a:avLst/>
+          </a:prstGeom>
+          <a:noFill/>
+          <a:ln/>
+        </p:spPr>
+        <p:txBody>
+          <a:bodyPr wrap="square" lIns="0" tIns="0" rIns="0" bIns="0" rtlCol="0" anchor="t"/>
+          <a:lstStyle/>
+          <a:p>
+            <a:pPr algn="l" marL="342900" indent="-342900">
+              <a:lnSpc>
+                <a:spcPts val="1620"/>
+              </a:lnSpc>
+              <a:spcAft>
+                <a:spcPts val="300"/>
+              </a:spcAft>
+              <a:buSzPct val="100000"/>
+              <a:buChar char="•"/>
+            </a:pPr>
+            <a:r>
+              <a:rPr lang="en-US" sz="1200" b="1" dirty="0">
+                <a:solidFill>
+                  <a:srgbClr val="1A1A1A"/>
+                </a:solidFill>
+                <a:latin typeface="Georgia" pitchFamily="34" charset="0"/>
+                <a:ea typeface="Georgia" pitchFamily="34" charset="-122"/>
+                <a:cs typeface="Georgia" pitchFamily="34" charset="-120"/>
+              </a:rPr>
+              <a:t>Tier up:</a:t>
+            </a:r>
+            <a:pPr algn="l" indent="0" marL="0">
+              <a:lnSpc>
+                <a:spcPts val="1620"/>
+              </a:lnSpc>
+              <a:spcAft>
+                <a:spcPts val="300"/>
+              </a:spcAft>
+              <a:buNone/>
+            </a:pPr>
+            <a:r>
+              <a:rPr lang="en-US" sz="1200" dirty="0">
+                <a:solidFill>
+                  <a:srgbClr val="1A1A1A"/>
+                </a:solidFill>
+                <a:latin typeface="Georgia" pitchFamily="34" charset="0"/>
+                <a:ea typeface="Georgia" pitchFamily="34" charset="-122"/>
+                <a:cs typeface="Georgia" pitchFamily="34" charset="-120"/>
+              </a:rPr>
+              <a:t> Take a position you DISAGREE with and defend it. (The hardest form of argument.)</a:t>
+            </a:r>
+            <a:endParaRPr lang="en-US" sz="1200" dirty="0"/>
+          </a:p>
+          <a:p>
+            <a:pPr algn="l" marL="342900" indent="-342900">
+              <a:lnSpc>
+                <a:spcPts val="1620"/>
+              </a:lnSpc>
+              <a:spcAft>
+                <a:spcPts val="300"/>
+              </a:spcAft>
+              <a:buSzPct val="100000"/>
+              <a:buChar char="•"/>
+            </a:pPr>
+            <a:r>
+              <a:rPr lang="en-US" sz="1200" b="1" dirty="0">
+                <a:solidFill>
+                  <a:srgbClr val="1A1A1A"/>
+                </a:solidFill>
+                <a:latin typeface="Georgia" pitchFamily="34" charset="0"/>
+                <a:ea typeface="Georgia" pitchFamily="34" charset="-122"/>
+                <a:cs typeface="Georgia" pitchFamily="34" charset="-120"/>
+              </a:rPr>
+              <a:t>Tier down:</a:t>
+            </a:r>
+            <a:pPr algn="l" indent="0" marL="0">
+              <a:lnSpc>
+                <a:spcPts val="1620"/>
+              </a:lnSpc>
+              <a:spcAft>
+                <a:spcPts val="300"/>
+              </a:spcAft>
+              <a:buNone/>
+            </a:pPr>
+            <a:r>
+              <a:rPr lang="en-US" sz="1200" dirty="0">
+                <a:solidFill>
+                  <a:srgbClr val="1A1A1A"/>
+                </a:solidFill>
+                <a:latin typeface="Georgia" pitchFamily="34" charset="0"/>
+                <a:ea typeface="Georgia" pitchFamily="34" charset="-122"/>
+                <a:cs typeface="Georgia" pitchFamily="34" charset="-120"/>
+              </a:rPr>
+              <a:t> Pre-prepare your 2-minute argument the night before.</a:t>
+            </a:r>
+            <a:endParaRPr lang="en-US" sz="1200" dirty="0"/>
+          </a:p>
+        </p:txBody>
+      </p:sp>
+      <p:sp>
+        <p:nvSpPr>
+          <p:cNvPr id="5" name="Text 3"/>
+          <p:cNvSpPr/>
+          <p:nvPr/>
+        </p:nvSpPr>
+        <p:spPr>
+          <a:xfrm>
+            <a:off x="406301" y="4434929"/>
+            <a:ext cx="8498026" cy="213271"/>
+          </a:xfrm>
+          <a:prstGeom prst="rect">
+            <a:avLst/>
+          </a:prstGeom>
+          <a:noFill/>
+          <a:ln/>
+        </p:spPr>
+        <p:txBody>
+          <a:bodyPr wrap="square" lIns="0" tIns="0" rIns="0" bIns="0" rtlCol="0" anchor="t"/>
+          <a:lstStyle/>
+          <a:p>
+            <a:pPr algn="l" indent="0" marL="0">
+              <a:lnSpc>
                 <a:spcPts val="1680"/>
               </a:lnSpc>
               <a:spcBef>
@@ -2528,15 +3222,460 @@
                 <a:ea typeface="Georgia" pitchFamily="34" charset="-122"/>
                 <a:cs typeface="Georgia" pitchFamily="34" charset="-120"/>
               </a:rPr>
+              <a:t>Senior ·  · IKS Curriculum</a:t>
+            </a:r>
+            <a:endParaRPr lang="en-US" sz="1200" dirty="0"/>
+          </a:p>
+        </p:txBody>
+      </p:sp>
+    </p:spTree>
+  </p:cSld>
+  <p:clrMapOvr>
+    <a:masterClrMapping/>
+  </p:clrMapOvr>
+</p:sld>
+</file>
+
+<file path=ppt/slides/slide13.xml><?xml version="1.0" encoding="utf-8"?>
+<p:sld xmlns:a="http://schemas.openxmlformats.org/drawingml/2006/main" xmlns:r="http://schemas.openxmlformats.org/officeDocument/2006/relationships" xmlns:p="http://schemas.openxmlformats.org/presentationml/2006/main">
+  <p:cSld name="Slide 13">
+    <p:bg>
+      <p:bgPr>
+        <a:solidFill>
+          <a:srgbClr val="FAF7F2"/>
+        </a:solidFill>
+      </p:bgPr>
+    </p:bg>
+    <p:spTree>
+      <p:nvGrpSpPr>
+        <p:cNvPr id="1" name=""/>
+        <p:cNvGrpSpPr/>
+        <p:nvPr/>
+      </p:nvGrpSpPr>
+      <p:grpSpPr>
+        <a:xfrm>
+          <a:off x="0" y="0"/>
+          <a:ext cx="0" cy="0"/>
+          <a:chOff x="0" y="0"/>
+          <a:chExt cx="0" cy="0"/>
+        </a:xfrm>
+      </p:grpSpPr>
+      <p:sp>
+        <p:nvSpPr>
+          <p:cNvPr id="2" name="Text 0"/>
+          <p:cNvSpPr/>
+          <p:nvPr/>
+        </p:nvSpPr>
+        <p:spPr>
+          <a:xfrm>
+            <a:off x="0" y="0"/>
+            <a:ext cx="9144000" cy="101501"/>
+          </a:xfrm>
+          <a:prstGeom prst="rect">
+            <a:avLst/>
+          </a:prstGeom>
+          <a:solidFill>
+            <a:srgbClr val="5D1D2E"/>
+          </a:solidFill>
+          <a:ln/>
+        </p:spPr>
+        <p:txBody>
+          <a:bodyPr wrap="square" rtlCol="0" anchor="ctr"/>
+          <a:lstStyle/>
+          <a:p>
+            <a:pPr indent="0" marL="0">
+              <a:buNone/>
+            </a:pPr>
+            <a:endParaRPr lang="en-US" dirty="0"/>
+          </a:p>
+        </p:txBody>
+      </p:sp>
+      <p:sp>
+        <p:nvSpPr>
+          <p:cNvPr id="3" name="Text 1"/>
+          <p:cNvSpPr/>
+          <p:nvPr/>
+        </p:nvSpPr>
+        <p:spPr>
+          <a:xfrm>
+            <a:off x="406301" y="457051"/>
+            <a:ext cx="8498026" cy="274290"/>
+          </a:xfrm>
+          <a:prstGeom prst="rect">
+            <a:avLst/>
+          </a:prstGeom>
+          <a:noFill/>
+          <a:ln/>
+        </p:spPr>
+        <p:txBody>
+          <a:bodyPr wrap="square" lIns="0" tIns="0" rIns="0" bIns="0" rtlCol="0" anchor="t"/>
+          <a:lstStyle/>
+          <a:p>
+            <a:pPr algn="l" indent="0" marL="0">
+              <a:lnSpc>
+                <a:spcPts val="2160"/>
+              </a:lnSpc>
+              <a:spcBef>
+                <a:spcPts val="600"/>
+              </a:spcBef>
+              <a:spcAft>
+                <a:spcPts val="800"/>
+              </a:spcAft>
+              <a:buNone/>
+            </a:pPr>
+            <a:r>
+              <a:rPr lang="en-US" sz="1800" b="1" dirty="0">
+                <a:solidFill>
+                  <a:srgbClr val="997929"/>
+                </a:solidFill>
+                <a:latin typeface="Times New Roman" pitchFamily="34" charset="0"/>
+                <a:ea typeface="Times New Roman" pitchFamily="34" charset="-122"/>
+                <a:cs typeface="Times New Roman" pitchFamily="34" charset="-120"/>
+              </a:rPr>
+              <a:t>Teacher notes</a:t>
+            </a:r>
+            <a:endParaRPr lang="en-US" sz="1800" dirty="0"/>
+          </a:p>
+        </p:txBody>
+      </p:sp>
+      <p:sp>
+        <p:nvSpPr>
+          <p:cNvPr id="4" name="Text 2"/>
+          <p:cNvSpPr/>
+          <p:nvPr/>
+        </p:nvSpPr>
+        <p:spPr>
+          <a:xfrm>
+            <a:off x="634901" y="883593"/>
+            <a:ext cx="8102798" cy="769441"/>
+          </a:xfrm>
+          <a:prstGeom prst="rect">
+            <a:avLst/>
+          </a:prstGeom>
+          <a:noFill/>
+          <a:ln/>
+        </p:spPr>
+        <p:txBody>
+          <a:bodyPr wrap="square" lIns="0" tIns="0" rIns="0" bIns="0" rtlCol="0" anchor="t"/>
+          <a:lstStyle/>
+          <a:p>
+            <a:pPr algn="l" marL="342900" indent="-342900">
+              <a:lnSpc>
+                <a:spcPts val="1620"/>
+              </a:lnSpc>
+              <a:spcAft>
+                <a:spcPts val="300"/>
+              </a:spcAft>
+              <a:buSzPct val="100000"/>
+              <a:buChar char="•"/>
+            </a:pPr>
+            <a:r>
+              <a:rPr lang="en-US" sz="1200" dirty="0">
+                <a:solidFill>
+                  <a:srgbClr val="1A1A1A"/>
+                </a:solidFill>
+                <a:latin typeface="Georgia" pitchFamily="34" charset="0"/>
+                <a:ea typeface="Georgia" pitchFamily="34" charset="-122"/>
+                <a:cs typeface="Georgia" pitchFamily="34" charset="-120"/>
+              </a:rPr>
+              <a:t>This is where some students discover they don't really know what they think. That's the point.</a:t>
+            </a:r>
+            <a:endParaRPr lang="en-US" sz="1200" dirty="0"/>
+          </a:p>
+          <a:p>
+            <a:pPr algn="l" marL="342900" indent="-342900">
+              <a:lnSpc>
+                <a:spcPts val="1620"/>
+              </a:lnSpc>
+              <a:spcAft>
+                <a:spcPts val="300"/>
+              </a:spcAft>
+              <a:buSzPct val="100000"/>
+              <a:buChar char="•"/>
+            </a:pPr>
+            <a:r>
+              <a:rPr lang="en-US" sz="1200" dirty="0">
+                <a:solidFill>
+                  <a:srgbClr val="1A1A1A"/>
+                </a:solidFill>
+                <a:latin typeface="Georgia" pitchFamily="34" charset="0"/>
+                <a:ea typeface="Georgia" pitchFamily="34" charset="-122"/>
+                <a:cs typeface="Georgia" pitchFamily="34" charset="-120"/>
+              </a:rPr>
+              <a:t>If the debate gets heated, slow it down: </a:t>
+            </a:r>
+            <a:pPr algn="l" indent="0" marL="0">
+              <a:lnSpc>
+                <a:spcPts val="1620"/>
+              </a:lnSpc>
+              <a:spcAft>
+                <a:spcPts val="300"/>
+              </a:spcAft>
+              <a:buNone/>
+            </a:pPr>
+            <a:r>
+              <a:rPr lang="en-US" sz="1200" i="1" dirty="0">
+                <a:solidFill>
+                  <a:srgbClr val="1A1A1A"/>
+                </a:solidFill>
+                <a:latin typeface="Georgia" pitchFamily="34" charset="0"/>
+                <a:ea typeface="Georgia" pitchFamily="34" charset="-122"/>
+                <a:cs typeface="Georgia" pitchFamily="34" charset="-120"/>
+              </a:rPr>
+              <a:t>"Steel-man the other side. What's their best argument?"</a:t>
+            </a:r>
+            <a:endParaRPr lang="en-US" sz="1200" dirty="0"/>
+          </a:p>
+          <a:p>
+            <a:pPr algn="l" marL="342900" indent="-342900">
+              <a:lnSpc>
+                <a:spcPts val="1620"/>
+              </a:lnSpc>
+              <a:spcAft>
+                <a:spcPts val="300"/>
+              </a:spcAft>
+              <a:buSzPct val="100000"/>
+              <a:buChar char="•"/>
+            </a:pPr>
+            <a:r>
+              <a:rPr lang="en-US" sz="1200" dirty="0">
+                <a:solidFill>
+                  <a:srgbClr val="1A1A1A"/>
+                </a:solidFill>
+                <a:latin typeface="Georgia" pitchFamily="34" charset="0"/>
+                <a:ea typeface="Georgia" pitchFamily="34" charset="-122"/>
+                <a:cs typeface="Georgia" pitchFamily="34" charset="-120"/>
+              </a:rPr>
+              <a:t>The Day 7 oral grade flows into the project rubric — not as a separate score.</a:t>
+            </a:r>
+            <a:endParaRPr lang="en-US" sz="1200" dirty="0"/>
+          </a:p>
+        </p:txBody>
+      </p:sp>
+      <p:sp>
+        <p:nvSpPr>
+          <p:cNvPr id="5" name="Text 3"/>
+          <p:cNvSpPr/>
+          <p:nvPr/>
+        </p:nvSpPr>
+        <p:spPr>
+          <a:xfrm>
+            <a:off x="406301" y="4434929"/>
+            <a:ext cx="8498026" cy="213271"/>
+          </a:xfrm>
+          <a:prstGeom prst="rect">
+            <a:avLst/>
+          </a:prstGeom>
+          <a:noFill/>
+          <a:ln/>
+        </p:spPr>
+        <p:txBody>
+          <a:bodyPr wrap="square" lIns="0" tIns="0" rIns="0" bIns="0" rtlCol="0" anchor="t"/>
+          <a:lstStyle/>
+          <a:p>
+            <a:pPr algn="l" indent="0" marL="0">
+              <a:lnSpc>
+                <a:spcPts val="1680"/>
+              </a:lnSpc>
+              <a:spcBef>
+                <a:spcPts val="300"/>
+              </a:spcBef>
+              <a:spcAft>
+                <a:spcPts val="300"/>
+              </a:spcAft>
+              <a:buNone/>
+            </a:pPr>
+            <a:r>
+              <a:rPr lang="en-US" sz="1200" dirty="0">
+                <a:solidFill>
+                  <a:srgbClr val="1A1A1A"/>
+                </a:solidFill>
+                <a:latin typeface="Georgia" pitchFamily="34" charset="0"/>
+                <a:ea typeface="Georgia" pitchFamily="34" charset="-122"/>
+                <a:cs typeface="Georgia" pitchFamily="34" charset="-120"/>
+              </a:rPr>
+              <a:t>Senior ·  · IKS Curriculum</a:t>
+            </a:r>
+            <a:endParaRPr lang="en-US" sz="1200" dirty="0"/>
+          </a:p>
+        </p:txBody>
+      </p:sp>
+    </p:spTree>
+  </p:cSld>
+  <p:clrMapOvr>
+    <a:masterClrMapping/>
+  </p:clrMapOvr>
+</p:sld>
+</file>
+
+<file path=ppt/slides/slide14.xml><?xml version="1.0" encoding="utf-8"?>
+<p:sld xmlns:a="http://schemas.openxmlformats.org/drawingml/2006/main" xmlns:r="http://schemas.openxmlformats.org/officeDocument/2006/relationships" xmlns:p="http://schemas.openxmlformats.org/presentationml/2006/main">
+  <p:cSld name="Slide 14">
+    <p:bg>
+      <p:bgPr>
+        <a:solidFill>
+          <a:srgbClr val="FAF7F2"/>
+        </a:solidFill>
+      </p:bgPr>
+    </p:bg>
+    <p:spTree>
+      <p:nvGrpSpPr>
+        <p:cNvPr id="1" name=""/>
+        <p:cNvGrpSpPr/>
+        <p:nvPr/>
+      </p:nvGrpSpPr>
+      <p:grpSpPr>
+        <a:xfrm>
+          <a:off x="0" y="0"/>
+          <a:ext cx="0" cy="0"/>
+          <a:chOff x="0" y="0"/>
+          <a:chExt cx="0" cy="0"/>
+        </a:xfrm>
+      </p:grpSpPr>
+      <p:sp>
+        <p:nvSpPr>
+          <p:cNvPr id="2" name="Text 0"/>
+          <p:cNvSpPr/>
+          <p:nvPr/>
+        </p:nvSpPr>
+        <p:spPr>
+          <a:xfrm>
+            <a:off x="0" y="0"/>
+            <a:ext cx="9144000" cy="101501"/>
+          </a:xfrm>
+          <a:prstGeom prst="rect">
+            <a:avLst/>
+          </a:prstGeom>
+          <a:solidFill>
+            <a:srgbClr val="5D1D2E"/>
+          </a:solidFill>
+          <a:ln/>
+        </p:spPr>
+        <p:txBody>
+          <a:bodyPr wrap="square" rtlCol="0" anchor="ctr"/>
+          <a:lstStyle/>
+          <a:p>
+            <a:pPr indent="0" marL="0">
+              <a:buNone/>
+            </a:pPr>
+            <a:endParaRPr lang="en-US" dirty="0"/>
+          </a:p>
+        </p:txBody>
+      </p:sp>
+      <p:sp>
+        <p:nvSpPr>
+          <p:cNvPr id="3" name="Text 1"/>
+          <p:cNvSpPr/>
+          <p:nvPr/>
+        </p:nvSpPr>
+        <p:spPr>
+          <a:xfrm>
+            <a:off x="406301" y="457051"/>
+            <a:ext cx="8498026" cy="274290"/>
+          </a:xfrm>
+          <a:prstGeom prst="rect">
+            <a:avLst/>
+          </a:prstGeom>
+          <a:noFill/>
+          <a:ln/>
+        </p:spPr>
+        <p:txBody>
+          <a:bodyPr wrap="square" lIns="0" tIns="0" rIns="0" bIns="0" rtlCol="0" anchor="t"/>
+          <a:lstStyle/>
+          <a:p>
+            <a:pPr algn="l" indent="0" marL="0">
+              <a:lnSpc>
+                <a:spcPts val="2160"/>
+              </a:lnSpc>
+              <a:spcBef>
+                <a:spcPts val="600"/>
+              </a:spcBef>
+              <a:spcAft>
+                <a:spcPts val="800"/>
+              </a:spcAft>
+              <a:buNone/>
+            </a:pPr>
+            <a:r>
+              <a:rPr lang="en-US" sz="1800" b="1" dirty="0">
+                <a:solidFill>
+                  <a:srgbClr val="997929"/>
+                </a:solidFill>
+                <a:latin typeface="Times New Roman" pitchFamily="34" charset="0"/>
+                <a:ea typeface="Times New Roman" pitchFamily="34" charset="-122"/>
+                <a:cs typeface="Times New Roman" pitchFamily="34" charset="-120"/>
+              </a:rPr>
+              <a:t>Citation(s) used</a:t>
+            </a:r>
+            <a:endParaRPr lang="en-US" sz="1800" dirty="0"/>
+          </a:p>
+        </p:txBody>
+      </p:sp>
+      <p:sp>
+        <p:nvSpPr>
+          <p:cNvPr id="4" name="Text 2"/>
+          <p:cNvSpPr/>
+          <p:nvPr/>
+        </p:nvSpPr>
+        <p:spPr>
+          <a:xfrm>
+            <a:off x="634901" y="883593"/>
+            <a:ext cx="8102798" cy="300930"/>
+          </a:xfrm>
+          <a:prstGeom prst="rect">
+            <a:avLst/>
+          </a:prstGeom>
+          <a:noFill/>
+          <a:ln/>
+        </p:spPr>
+        <p:txBody>
+          <a:bodyPr wrap="square" lIns="0" tIns="0" rIns="0" bIns="0" rtlCol="0" anchor="t"/>
+          <a:lstStyle/>
+          <a:p>
+            <a:pPr algn="l" marL="342900" indent="-342900">
+              <a:lnSpc>
+                <a:spcPts val="1620"/>
+              </a:lnSpc>
+              <a:spcAft>
+                <a:spcPts val="300"/>
+              </a:spcAft>
+              <a:buSzPct val="100000"/>
+              <a:buChar char="•"/>
+            </a:pPr>
+            <a:r>
+              <a:rPr lang="en-US" sz="1200" dirty="0">
+                <a:solidFill>
+                  <a:srgbClr val="1A1A1A"/>
+                </a:solidFill>
+                <a:latin typeface="Georgia" pitchFamily="34" charset="0"/>
+                <a:ea typeface="Georgia" pitchFamily="34" charset="-122"/>
+                <a:cs typeface="Georgia" pitchFamily="34" charset="-120"/>
+              </a:rPr>
+              <a:t>All sources from </a:t>
+            </a:r>
+            <a:pPr algn="l" indent="0" marL="0">
+              <a:lnSpc>
+                <a:spcPts val="1620"/>
+              </a:lnSpc>
+              <a:spcAft>
+                <a:spcPts val="300"/>
+              </a:spcAft>
+              <a:buNone/>
+            </a:pPr>
+            <a:r>
+              <a:rPr lang="en-US" sz="1200" dirty="0">
+                <a:solidFill>
+                  <a:srgbClr val="1A1A1A"/>
+                </a:solidFill>
+                <a:latin typeface="Georgia" pitchFamily="34" charset="0"/>
+                <a:ea typeface="Georgia" pitchFamily="34" charset="-122"/>
+                <a:cs typeface="Georgia" pitchFamily="34" charset="-120"/>
+              </a:rPr>
               <a:t>sources.md</a:t>
             </a:r>
             <a:pPr algn="l" indent="0" marL="0">
               <a:lnSpc>
-                <a:spcPts val="1680"/>
-              </a:lnSpc>
-              <a:spcBef>
-                <a:spcPts val="300"/>
-              </a:spcBef>
+                <a:spcPts val="1620"/>
+              </a:lnSpc>
               <a:spcAft>
                 <a:spcPts val="300"/>
               </a:spcAft>
@@ -2709,7 +3848,7 @@
                 <a:ea typeface="Times New Roman" pitchFamily="34" charset="-122"/>
                 <a:cs typeface="Times New Roman" pitchFamily="34" charset="-120"/>
               </a:rPr>
-              <a:t>Materials</a:t>
+              <a:t>Learning objective</a:t>
             </a:r>
             <a:endParaRPr lang="en-US" sz="1800" dirty="0"/>
           </a:p>
@@ -2724,7 +3863,7 @@
         <p:spPr>
           <a:xfrm>
             <a:off x="406301" y="870942"/>
-            <a:ext cx="8498026" cy="213271"/>
+            <a:ext cx="8498026" cy="426541"/>
           </a:xfrm>
           <a:prstGeom prst="rect">
             <a:avLst/>
@@ -2757,7 +3896,7 @@
                 <a:ea typeface="Georgia" pitchFamily="34" charset="-122"/>
                 <a:cs typeface="Georgia" pitchFamily="34" charset="-120"/>
               </a:rPr>
-              <a:t>– Whiteboard – Stopwatch – Score sheet for the oral assessment (rubric below)</a:t>
+              <a:t>Students articulate and defend a position on whether classical Indian intellectual frameworks should be taught in mainstream science class, with at least one citation and one steel-manned counter-argument.</a:t>
             </a:r>
             <a:endParaRPr lang="en-US" sz="1200" dirty="0"/>
           </a:p>
@@ -2915,7 +4054,7 @@
                 <a:ea typeface="Times New Roman" pitchFamily="34" charset="-122"/>
                 <a:cs typeface="Times New Roman" pitchFamily="34" charset="-120"/>
               </a:rPr>
-              <a:t>Flow</a:t>
+              <a:t>Materials</a:t>
             </a:r>
             <a:endParaRPr lang="en-US" sz="1800" dirty="0"/>
           </a:p>
@@ -2924,6 +4063,100 @@
       <p:sp>
         <p:nvSpPr>
           <p:cNvPr id="4" name="Text 2"/>
+          <p:cNvSpPr/>
+          <p:nvPr/>
+        </p:nvSpPr>
+        <p:spPr>
+          <a:xfrm>
+            <a:off x="634901" y="883593"/>
+            <a:ext cx="8102798" cy="769441"/>
+          </a:xfrm>
+          <a:prstGeom prst="rect">
+            <a:avLst/>
+          </a:prstGeom>
+          <a:noFill/>
+          <a:ln/>
+        </p:spPr>
+        <p:txBody>
+          <a:bodyPr wrap="square" lIns="0" tIns="0" rIns="0" bIns="0" rtlCol="0" anchor="t"/>
+          <a:lstStyle/>
+          <a:p>
+            <a:pPr algn="l" marL="342900" indent="-342900">
+              <a:lnSpc>
+                <a:spcPts val="1620"/>
+              </a:lnSpc>
+              <a:spcAft>
+                <a:spcPts val="300"/>
+              </a:spcAft>
+              <a:buSzPct val="100000"/>
+              <a:buChar char="•"/>
+            </a:pPr>
+            <a:r>
+              <a:rPr lang="en-US" sz="1200" dirty="0">
+                <a:solidFill>
+                  <a:srgbClr val="1A1A1A"/>
+                </a:solidFill>
+                <a:latin typeface="Georgia" pitchFamily="34" charset="0"/>
+                <a:ea typeface="Georgia" pitchFamily="34" charset="-122"/>
+                <a:cs typeface="Georgia" pitchFamily="34" charset="-120"/>
+              </a:rPr>
+              <a:t>Whiteboard</a:t>
+            </a:r>
+            <a:endParaRPr lang="en-US" sz="1200" dirty="0"/>
+          </a:p>
+          <a:p>
+            <a:pPr algn="l" marL="342900" indent="-342900">
+              <a:lnSpc>
+                <a:spcPts val="1620"/>
+              </a:lnSpc>
+              <a:spcAft>
+                <a:spcPts val="300"/>
+              </a:spcAft>
+              <a:buSzPct val="100000"/>
+              <a:buChar char="•"/>
+            </a:pPr>
+            <a:r>
+              <a:rPr lang="en-US" sz="1200" dirty="0">
+                <a:solidFill>
+                  <a:srgbClr val="1A1A1A"/>
+                </a:solidFill>
+                <a:latin typeface="Georgia" pitchFamily="34" charset="0"/>
+                <a:ea typeface="Georgia" pitchFamily="34" charset="-122"/>
+                <a:cs typeface="Georgia" pitchFamily="34" charset="-120"/>
+              </a:rPr>
+              <a:t>Stopwatch</a:t>
+            </a:r>
+            <a:endParaRPr lang="en-US" sz="1200" dirty="0"/>
+          </a:p>
+          <a:p>
+            <a:pPr algn="l" marL="342900" indent="-342900">
+              <a:lnSpc>
+                <a:spcPts val="1620"/>
+              </a:lnSpc>
+              <a:spcAft>
+                <a:spcPts val="300"/>
+              </a:spcAft>
+              <a:buSzPct val="100000"/>
+              <a:buChar char="•"/>
+            </a:pPr>
+            <a:r>
+              <a:rPr lang="en-US" sz="1200" dirty="0">
+                <a:solidFill>
+                  <a:srgbClr val="1A1A1A"/>
+                </a:solidFill>
+                <a:latin typeface="Georgia" pitchFamily="34" charset="0"/>
+                <a:ea typeface="Georgia" pitchFamily="34" charset="-122"/>
+                <a:cs typeface="Georgia" pitchFamily="34" charset="-120"/>
+              </a:rPr>
+              <a:t>Score sheet for the oral assessment (rubric below)</a:t>
+            </a:r>
+            <a:endParaRPr lang="en-US" sz="1200" dirty="0"/>
+          </a:p>
+        </p:txBody>
+      </p:sp>
+      <p:sp>
+        <p:nvSpPr>
+          <p:cNvPr id="5" name="Text 3"/>
           <p:cNvSpPr/>
           <p:nvPr/>
         </p:nvSpPr>
@@ -3073,7 +4306,7 @@
                 <a:ea typeface="Times New Roman" pitchFamily="34" charset="-122"/>
                 <a:cs typeface="Times New Roman" pitchFamily="34" charset="-120"/>
               </a:rPr>
-              <a:t>Warm-up (3 min)</a:t>
+              <a:t>Flow</a:t>
             </a:r>
             <a:endParaRPr lang="en-US" sz="1800" dirty="0"/>
           </a:p>
@@ -3082,54 +4315,6 @@
       <p:sp>
         <p:nvSpPr>
           <p:cNvPr id="4" name="Text 2"/>
-          <p:cNvSpPr/>
-          <p:nvPr/>
-        </p:nvSpPr>
-        <p:spPr>
-          <a:xfrm>
-            <a:off x="406301" y="870942"/>
-            <a:ext cx="8498026" cy="213271"/>
-          </a:xfrm>
-          <a:prstGeom prst="rect">
-            <a:avLst/>
-          </a:prstGeom>
-          <a:noFill/>
-          <a:ln/>
-        </p:spPr>
-        <p:txBody>
-          <a:bodyPr wrap="square" lIns="0" tIns="0" rIns="0" bIns="0" rtlCol="0" anchor="t"/>
-          <a:lstStyle/>
-          <a:p>
-            <a:pPr algn="l" indent="0" marL="0">
-              <a:lnSpc>
-                <a:spcPts val="1680"/>
-              </a:lnSpc>
-              <a:spcBef>
-                <a:spcPts val="300"/>
-              </a:spcBef>
-              <a:spcAft>
-                <a:spcPts val="300"/>
-              </a:spcAft>
-              <a:buNone/>
-            </a:pPr>
-            <a:r>
-              <a:rPr lang="en-US" sz="1200" dirty="0">
-                <a:solidFill>
-                  <a:srgbClr val="1A1A1A"/>
-                </a:solidFill>
-                <a:latin typeface="Georgia" pitchFamily="34" charset="0"/>
-                <a:ea typeface="Georgia" pitchFamily="34" charset="-122"/>
-                <a:cs typeface="Georgia" pitchFamily="34" charset="-120"/>
-              </a:rPr>
-              <a:t>– Brief: today is structured debate. Three positions on the table. Pick one. Defend it. Acknowledge the other two fairly.</a:t>
-            </a:r>
-            <a:endParaRPr lang="en-US" sz="1200" dirty="0"/>
-          </a:p>
-        </p:txBody>
-      </p:sp>
-      <p:sp>
-        <p:nvSpPr>
-          <p:cNvPr id="5" name="Text 3"/>
           <p:cNvSpPr/>
           <p:nvPr/>
         </p:nvSpPr>
@@ -3279,7 +4464,7 @@
                 <a:ea typeface="Times New Roman" pitchFamily="34" charset="-122"/>
                 <a:cs typeface="Times New Roman" pitchFamily="34" charset="-120"/>
               </a:rPr>
-              <a:t>The three positions (5 min — clarify, don't argue yet)</a:t>
+              <a:t>Warm-up (3 min)</a:t>
             </a:r>
             <a:endParaRPr lang="en-US" sz="1800" dirty="0"/>
           </a:p>
@@ -3293,8 +4478,8 @@
         </p:nvSpPr>
         <p:spPr>
           <a:xfrm>
-            <a:off x="406301" y="870942"/>
-            <a:ext cx="8498026" cy="213271"/>
+            <a:off x="634901" y="883593"/>
+            <a:ext cx="8102798" cy="281880"/>
           </a:xfrm>
           <a:prstGeom prst="rect">
             <a:avLst/>
@@ -3306,102 +4491,6 @@
           <a:bodyPr wrap="square" lIns="0" tIns="0" rIns="0" bIns="0" rtlCol="0" anchor="t"/>
           <a:lstStyle/>
           <a:p>
-            <a:pPr algn="l" indent="0" marL="0">
-              <a:lnSpc>
-                <a:spcPts val="1680"/>
-              </a:lnSpc>
-              <a:spcBef>
-                <a:spcPts val="300"/>
-              </a:spcBef>
-              <a:spcAft>
-                <a:spcPts val="300"/>
-              </a:spcAft>
-              <a:buNone/>
-            </a:pPr>
-            <a:r>
-              <a:rPr lang="en-US" sz="1200" dirty="0">
-                <a:solidFill>
-                  <a:srgbClr val="1A1A1A"/>
-                </a:solidFill>
-                <a:latin typeface="Georgia" pitchFamily="34" charset="0"/>
-                <a:ea typeface="Georgia" pitchFamily="34" charset="-122"/>
-                <a:cs typeface="Georgia" pitchFamily="34" charset="-120"/>
-              </a:rPr>
-              <a:t>Write on board:</a:t>
-            </a:r>
-            <a:endParaRPr lang="en-US" sz="1200" dirty="0"/>
-          </a:p>
-        </p:txBody>
-      </p:sp>
-      <p:sp>
-        <p:nvSpPr>
-          <p:cNvPr id="5" name="Text 3"/>
-          <p:cNvSpPr/>
-          <p:nvPr/>
-        </p:nvSpPr>
-        <p:spPr>
-          <a:xfrm>
-            <a:off x="406301" y="1160413"/>
-            <a:ext cx="8498026" cy="213271"/>
-          </a:xfrm>
-          <a:prstGeom prst="rect">
-            <a:avLst/>
-          </a:prstGeom>
-          <a:noFill/>
-          <a:ln/>
-        </p:spPr>
-        <p:txBody>
-          <a:bodyPr wrap="square" lIns="0" tIns="0" rIns="0" bIns="0" rtlCol="0" anchor="t"/>
-          <a:lstStyle/>
-          <a:p>
-            <a:pPr algn="l" indent="0" marL="0">
-              <a:lnSpc>
-                <a:spcPts val="1680"/>
-              </a:lnSpc>
-              <a:spcBef>
-                <a:spcPts val="300"/>
-              </a:spcBef>
-              <a:spcAft>
-                <a:spcPts val="300"/>
-              </a:spcAft>
-              <a:buNone/>
-            </a:pPr>
-            <a:r>
-              <a:rPr lang="en-US" sz="1200" i="1" dirty="0">
-                <a:solidFill>
-                  <a:srgbClr val="1A1A1A"/>
-                </a:solidFill>
-                <a:latin typeface="Georgia" pitchFamily="34" charset="0"/>
-                <a:ea typeface="Georgia" pitchFamily="34" charset="-122"/>
-                <a:cs typeface="Georgia" pitchFamily="34" charset="-120"/>
-              </a:rPr>
-              <a:t>Each row: Position · One-line claim.</a:t>
-            </a:r>
-            <a:endParaRPr lang="en-US" sz="1200" dirty="0"/>
-          </a:p>
-        </p:txBody>
-      </p:sp>
-      <p:sp>
-        <p:nvSpPr>
-          <p:cNvPr id="6" name="Text 4"/>
-          <p:cNvSpPr/>
-          <p:nvPr/>
-        </p:nvSpPr>
-        <p:spPr>
-          <a:xfrm>
-            <a:off x="634901" y="1462534"/>
-            <a:ext cx="8102798" cy="769441"/>
-          </a:xfrm>
-          <a:prstGeom prst="rect">
-            <a:avLst/>
-          </a:prstGeom>
-          <a:noFill/>
-          <a:ln/>
-        </p:spPr>
-        <p:txBody>
-          <a:bodyPr wrap="square" lIns="0" tIns="0" rIns="0" bIns="0" rtlCol="0" anchor="t"/>
-          <a:lstStyle/>
-          <a:p>
             <a:pPr algn="l" marL="342900" indent="-342900">
               <a:lnSpc>
                 <a:spcPts val="1620"/>
@@ -3413,26 +4502,6 @@
               <a:buChar char="•"/>
             </a:pPr>
             <a:r>
-              <a:rPr lang="en-US" sz="1200" b="1" dirty="0">
-                <a:solidFill>
-                  <a:srgbClr val="1A1A1A"/>
-                </a:solidFill>
-                <a:latin typeface="Georgia" pitchFamily="34" charset="0"/>
-                <a:ea typeface="Georgia" pitchFamily="34" charset="-122"/>
-                <a:cs typeface="Georgia" pitchFamily="34" charset="-120"/>
-              </a:rPr>
-              <a:t>A — Integration</a:t>
-            </a:r>
-            <a:pPr algn="l" indent="0" marL="0">
-              <a:lnSpc>
-                <a:spcPts val="1620"/>
-              </a:lnSpc>
-              <a:spcAft>
-                <a:spcPts val="300"/>
-              </a:spcAft>
-              <a:buNone/>
-            </a:pPr>
-            <a:r>
               <a:rPr lang="en-US" sz="1200" dirty="0">
                 <a:solidFill>
                   <a:srgbClr val="1A1A1A"/>
@@ -3441,103 +4510,15 @@
                 <a:ea typeface="Georgia" pitchFamily="34" charset="-122"/>
                 <a:cs typeface="Georgia" pitchFamily="34" charset="-120"/>
               </a:rPr>
-              <a:t> — IKS frameworks should be taught alongside modern science in mainstream science class.</a:t>
+              <a:t>Brief: today is structured debate. Three positions on the table. Pick one. Defend it. Acknowledge the other two fairly.</a:t>
             </a:r>
             <a:endParaRPr lang="en-US" sz="1200" dirty="0"/>
           </a:p>
-          <a:p>
-            <a:pPr algn="l" marL="342900" indent="-342900">
-              <a:lnSpc>
-                <a:spcPts val="1620"/>
-              </a:lnSpc>
-              <a:spcAft>
-                <a:spcPts val="300"/>
-              </a:spcAft>
-              <a:buSzPct val="100000"/>
-              <a:buChar char="•"/>
-            </a:pPr>
-            <a:r>
-              <a:rPr lang="en-US" sz="1200" b="1" dirty="0">
-                <a:solidFill>
-                  <a:srgbClr val="1A1A1A"/>
-                </a:solidFill>
-                <a:latin typeface="Georgia" pitchFamily="34" charset="0"/>
-                <a:ea typeface="Georgia" pitchFamily="34" charset="-122"/>
-                <a:cs typeface="Georgia" pitchFamily="34" charset="-120"/>
-              </a:rPr>
-              <a:t>B — Separation</a:t>
-            </a:r>
-            <a:pPr algn="l" indent="0" marL="0">
-              <a:lnSpc>
-                <a:spcPts val="1620"/>
-              </a:lnSpc>
-              <a:spcAft>
-                <a:spcPts val="300"/>
-              </a:spcAft>
-              <a:buNone/>
-            </a:pPr>
-            <a:r>
-              <a:rPr lang="en-US" sz="1200" dirty="0">
-                <a:solidFill>
-                  <a:srgbClr val="1A1A1A"/>
-                </a:solidFill>
-                <a:latin typeface="Georgia" pitchFamily="34" charset="0"/>
-                <a:ea typeface="Georgia" pitchFamily="34" charset="-122"/>
-                <a:cs typeface="Georgia" pitchFamily="34" charset="-120"/>
-              </a:rPr>
-              <a:t> — IKS should be taught in cultural studies or philosophy, not in science class.</a:t>
-            </a:r>
-            <a:endParaRPr lang="en-US" sz="1200" dirty="0"/>
-          </a:p>
-          <a:p>
-            <a:pPr algn="l" marL="342900" indent="-342900">
-              <a:lnSpc>
-                <a:spcPts val="1620"/>
-              </a:lnSpc>
-              <a:spcAft>
-                <a:spcPts val="300"/>
-              </a:spcAft>
-              <a:buSzPct val="100000"/>
-              <a:buChar char="•"/>
-            </a:pPr>
-            <a:r>
-              <a:rPr lang="en-US" sz="1200" b="1" dirty="0">
-                <a:solidFill>
-                  <a:srgbClr val="1A1A1A"/>
-                </a:solidFill>
-                <a:latin typeface="Georgia" pitchFamily="34" charset="0"/>
-                <a:ea typeface="Georgia" pitchFamily="34" charset="-122"/>
-                <a:cs typeface="Georgia" pitchFamily="34" charset="-120"/>
-              </a:rPr>
-              <a:t>C — Hybrid</a:t>
-            </a:r>
-            <a:pPr algn="l" indent="0" marL="0">
-              <a:lnSpc>
-                <a:spcPts val="1620"/>
-              </a:lnSpc>
-              <a:spcAft>
-                <a:spcPts val="300"/>
-              </a:spcAft>
-              <a:buNone/>
-            </a:pPr>
-            <a:r>
-              <a:rPr lang="en-US" sz="1200" dirty="0">
-                <a:solidFill>
-                  <a:srgbClr val="1A1A1A"/>
-                </a:solidFill>
-                <a:latin typeface="Georgia" pitchFamily="34" charset="0"/>
-                <a:ea typeface="Georgia" pitchFamily="34" charset="-122"/>
-                <a:cs typeface="Georgia" pitchFamily="34" charset="-120"/>
-              </a:rPr>
-              <a:t> — IKS should be referenced briefly in science class as historical context, but not taught as parallel content.</a:t>
-            </a:r>
-            <a:endParaRPr lang="en-US" sz="1200" dirty="0"/>
-          </a:p>
-        </p:txBody>
-      </p:sp>
-      <p:sp>
-        <p:nvSpPr>
-          <p:cNvPr id="7" name="Text 5"/>
+        </p:txBody>
+      </p:sp>
+      <p:sp>
+        <p:nvSpPr>
+          <p:cNvPr id="5" name="Text 3"/>
           <p:cNvSpPr/>
           <p:nvPr/>
         </p:nvSpPr>
@@ -3687,7 +4668,7 @@
                 <a:ea typeface="Times New Roman" pitchFamily="34" charset="-122"/>
                 <a:cs typeface="Times New Roman" pitchFamily="34" charset="-120"/>
               </a:rPr>
-              <a:t>Debate (25 min)</a:t>
+              <a:t>The three positions (5 min — clarify, don't argue yet)</a:t>
             </a:r>
             <a:endParaRPr lang="en-US" sz="1800" dirty="0"/>
           </a:p>
@@ -3702,7 +4683,7 @@
         <p:spPr>
           <a:xfrm>
             <a:off x="406301" y="870942"/>
-            <a:ext cx="8498026" cy="639812"/>
+            <a:ext cx="8498026" cy="213271"/>
           </a:xfrm>
           <a:prstGeom prst="rect">
             <a:avLst/>
@@ -3735,7 +4716,7 @@
                 <a:ea typeface="Georgia" pitchFamily="34" charset="-122"/>
                 <a:cs typeface="Georgia" pitchFamily="34" charset="-120"/>
               </a:rPr>
-              <a:t>– Divide class into 3 groups by position (let students self-select; balance roughly). – 5 min: each group prepares — strongest 2 arguments, 1 steel-manned response to the other two positions. – 12 min: structured debate. Each group has 4 min.   – 2 min: main argument.   – 1 min: response to the other 2 positions.   – 1 min: closing. – 8 min: open floor cross-questions.</a:t>
+              <a:t>Write on board:</a:t>
             </a:r>
             <a:endParaRPr lang="en-US" sz="1200" dirty="0"/>
           </a:p>
@@ -3744,6 +4725,54 @@
       <p:sp>
         <p:nvSpPr>
           <p:cNvPr id="5" name="Text 3"/>
+          <p:cNvSpPr/>
+          <p:nvPr/>
+        </p:nvSpPr>
+        <p:spPr>
+          <a:xfrm>
+            <a:off x="406301" y="1160413"/>
+            <a:ext cx="8498026" cy="213271"/>
+          </a:xfrm>
+          <a:prstGeom prst="rect">
+            <a:avLst/>
+          </a:prstGeom>
+          <a:noFill/>
+          <a:ln/>
+        </p:spPr>
+        <p:txBody>
+          <a:bodyPr wrap="square" lIns="0" tIns="0" rIns="0" bIns="0" rtlCol="0" anchor="t"/>
+          <a:lstStyle/>
+          <a:p>
+            <a:pPr algn="l" indent="0" marL="0">
+              <a:lnSpc>
+                <a:spcPts val="1680"/>
+              </a:lnSpc>
+              <a:spcBef>
+                <a:spcPts val="300"/>
+              </a:spcBef>
+              <a:spcAft>
+                <a:spcPts val="300"/>
+              </a:spcAft>
+              <a:buNone/>
+            </a:pPr>
+            <a:r>
+              <a:rPr lang="en-US" sz="1200" i="1" dirty="0">
+                <a:solidFill>
+                  <a:srgbClr val="1A1A1A"/>
+                </a:solidFill>
+                <a:latin typeface="Georgia" pitchFamily="34" charset="0"/>
+                <a:ea typeface="Georgia" pitchFamily="34" charset="-122"/>
+                <a:cs typeface="Georgia" pitchFamily="34" charset="-120"/>
+              </a:rPr>
+              <a:t>Each row: Position · One-line claim.</a:t>
+            </a:r>
+            <a:endParaRPr lang="en-US" sz="1200" dirty="0"/>
+          </a:p>
+        </p:txBody>
+      </p:sp>
+      <p:sp>
+        <p:nvSpPr>
+          <p:cNvPr id="6" name="Text 4"/>
           <p:cNvSpPr/>
           <p:nvPr/>
         </p:nvSpPr>
@@ -3893,7 +4922,7 @@
                 <a:ea typeface="Times New Roman" pitchFamily="34" charset="-122"/>
                 <a:cs typeface="Times New Roman" pitchFamily="34" charset="-120"/>
               </a:rPr>
-              <a:t>Oral assessment (during the debate)</a:t>
+              <a:t>The three positions (5 min — clarify, don't argue yet) (cont.)</a:t>
             </a:r>
             <a:endParaRPr lang="en-US" sz="1800" dirty="0"/>
           </a:p>
@@ -3907,8 +4936,8 @@
         </p:nvSpPr>
         <p:spPr>
           <a:xfrm>
-            <a:off x="406301" y="870942"/>
-            <a:ext cx="8498026" cy="213271"/>
+            <a:off x="634901" y="883593"/>
+            <a:ext cx="8102798" cy="769441"/>
           </a:xfrm>
           <a:prstGeom prst="rect">
             <a:avLst/>
@@ -3920,102 +4949,6 @@
           <a:bodyPr wrap="square" lIns="0" tIns="0" rIns="0" bIns="0" rtlCol="0" anchor="t"/>
           <a:lstStyle/>
           <a:p>
-            <a:pPr algn="l" indent="0" marL="0">
-              <a:lnSpc>
-                <a:spcPts val="1680"/>
-              </a:lnSpc>
-              <a:spcBef>
-                <a:spcPts val="300"/>
-              </a:spcBef>
-              <a:spcAft>
-                <a:spcPts val="300"/>
-              </a:spcAft>
-              <a:buNone/>
-            </a:pPr>
-            <a:r>
-              <a:rPr lang="en-US" sz="1200" dirty="0">
-                <a:solidFill>
-                  <a:srgbClr val="1A1A1A"/>
-                </a:solidFill>
-                <a:latin typeface="Georgia" pitchFamily="34" charset="0"/>
-                <a:ea typeface="Georgia" pitchFamily="34" charset="-122"/>
-                <a:cs typeface="Georgia" pitchFamily="34" charset="-120"/>
-              </a:rPr>
-              <a:t>Teacher uses this rubric to score 5 students chosen at random:</a:t>
-            </a:r>
-            <a:endParaRPr lang="en-US" sz="1200" dirty="0"/>
-          </a:p>
-        </p:txBody>
-      </p:sp>
-      <p:sp>
-        <p:nvSpPr>
-          <p:cNvPr id="5" name="Text 3"/>
-          <p:cNvSpPr/>
-          <p:nvPr/>
-        </p:nvSpPr>
-        <p:spPr>
-          <a:xfrm>
-            <a:off x="406301" y="1160413"/>
-            <a:ext cx="8498026" cy="213271"/>
-          </a:xfrm>
-          <a:prstGeom prst="rect">
-            <a:avLst/>
-          </a:prstGeom>
-          <a:noFill/>
-          <a:ln/>
-        </p:spPr>
-        <p:txBody>
-          <a:bodyPr wrap="square" lIns="0" tIns="0" rIns="0" bIns="0" rtlCol="0" anchor="t"/>
-          <a:lstStyle/>
-          <a:p>
-            <a:pPr algn="l" indent="0" marL="0">
-              <a:lnSpc>
-                <a:spcPts val="1680"/>
-              </a:lnSpc>
-              <a:spcBef>
-                <a:spcPts val="300"/>
-              </a:spcBef>
-              <a:spcAft>
-                <a:spcPts val="300"/>
-              </a:spcAft>
-              <a:buNone/>
-            </a:pPr>
-            <a:r>
-              <a:rPr lang="en-US" sz="1200" i="1" dirty="0">
-                <a:solidFill>
-                  <a:srgbClr val="1A1A1A"/>
-                </a:solidFill>
-                <a:latin typeface="Georgia" pitchFamily="34" charset="0"/>
-                <a:ea typeface="Georgia" pitchFamily="34" charset="-122"/>
-                <a:cs typeface="Georgia" pitchFamily="34" charset="-120"/>
-              </a:rPr>
-              <a:t>Each row: Criterion · 4 · 3 · 2 · 1.</a:t>
-            </a:r>
-            <a:endParaRPr lang="en-US" sz="1200" dirty="0"/>
-          </a:p>
-        </p:txBody>
-      </p:sp>
-      <p:sp>
-        <p:nvSpPr>
-          <p:cNvPr id="6" name="Text 4"/>
-          <p:cNvSpPr/>
-          <p:nvPr/>
-        </p:nvSpPr>
-        <p:spPr>
-          <a:xfrm>
-            <a:off x="634901" y="1462534"/>
-            <a:ext cx="8102798" cy="1013222"/>
-          </a:xfrm>
-          <a:prstGeom prst="rect">
-            <a:avLst/>
-          </a:prstGeom>
-          <a:noFill/>
-          <a:ln/>
-        </p:spPr>
-        <p:txBody>
-          <a:bodyPr wrap="square" lIns="0" tIns="0" rIns="0" bIns="0" rtlCol="0" anchor="t"/>
-          <a:lstStyle/>
-          <a:p>
             <a:pPr algn="l" marL="342900" indent="-342900">
               <a:lnSpc>
                 <a:spcPts val="1620"/>
@@ -4035,7 +4968,7 @@
                 <a:ea typeface="Georgia" pitchFamily="34" charset="-122"/>
                 <a:cs typeface="Georgia" pitchFamily="34" charset="-120"/>
               </a:rPr>
-              <a:t>Position clarity</a:t>
+              <a:t>A — Integration</a:t>
             </a:r>
             <a:pPr algn="l" indent="0" marL="0">
               <a:lnSpc>
@@ -4055,7 +4988,7 @@
                 <a:ea typeface="Georgia" pitchFamily="34" charset="-122"/>
                 <a:cs typeface="Georgia" pitchFamily="34" charset="-120"/>
               </a:rPr>
-              <a:t> — Crystal clear with 1-line summary · Clear · Mostly clear · Unclear</a:t>
+              <a:t> — IKS frameworks should be taught alongside modern science in mainstream science class.</a:t>
             </a:r>
             <a:endParaRPr lang="en-US" sz="1200" dirty="0"/>
           </a:p>
@@ -4079,7 +5012,7 @@
                 <a:ea typeface="Georgia" pitchFamily="34" charset="-122"/>
                 <a:cs typeface="Georgia" pitchFamily="34" charset="-120"/>
               </a:rPr>
-              <a:t>Use of evidence</a:t>
+              <a:t>B — Separation</a:t>
             </a:r>
             <a:pPr algn="l" indent="0" marL="0">
               <a:lnSpc>
@@ -4099,7 +5032,7 @@
                 <a:ea typeface="Georgia" pitchFamily="34" charset="-122"/>
                 <a:cs typeface="Georgia" pitchFamily="34" charset="-120"/>
               </a:rPr>
-              <a:t> — Cites at least 1 specific source · Cites generally · Vague references · No evidence</a:t>
+              <a:t> — IKS should be taught in cultural studies or philosophy, not in science class.</a:t>
             </a:r>
             <a:endParaRPr lang="en-US" sz="1200" dirty="0"/>
           </a:p>
@@ -4123,7 +5056,7 @@
                 <a:ea typeface="Georgia" pitchFamily="34" charset="-122"/>
                 <a:cs typeface="Georgia" pitchFamily="34" charset="-120"/>
               </a:rPr>
-              <a:t>Counter-argument</a:t>
+              <a:t>C — Hybrid</a:t>
             </a:r>
             <a:pPr algn="l" indent="0" marL="0">
               <a:lnSpc>
@@ -4143,59 +5076,15 @@
                 <a:ea typeface="Georgia" pitchFamily="34" charset="-122"/>
                 <a:cs typeface="Georgia" pitchFamily="34" charset="-120"/>
               </a:rPr>
-              <a:t> — Steel-mans an opposing view · Acknowledges another view · Mentions another view · Ignores</a:t>
+              <a:t> — IKS should be referenced briefly in science class as historical context, but not taught as parallel content.</a:t>
             </a:r>
             <a:endParaRPr lang="en-US" sz="1200" dirty="0"/>
           </a:p>
-          <a:p>
-            <a:pPr algn="l" marL="342900" indent="-342900">
-              <a:lnSpc>
-                <a:spcPts val="1620"/>
-              </a:lnSpc>
-              <a:spcAft>
-                <a:spcPts val="300"/>
-              </a:spcAft>
-              <a:buSzPct val="100000"/>
-              <a:buChar char="•"/>
-            </a:pPr>
-            <a:r>
-              <a:rPr lang="en-US" sz="1200" b="1" dirty="0">
-                <a:solidFill>
-                  <a:srgbClr val="1A1A1A"/>
-                </a:solidFill>
-                <a:latin typeface="Georgia" pitchFamily="34" charset="0"/>
-                <a:ea typeface="Georgia" pitchFamily="34" charset="-122"/>
-                <a:cs typeface="Georgia" pitchFamily="34" charset="-120"/>
-              </a:rPr>
-              <a:t>Listening</a:t>
-            </a:r>
-            <a:pPr algn="l" indent="0" marL="0">
-              <a:lnSpc>
-                <a:spcPts val="1620"/>
-              </a:lnSpc>
-              <a:spcAft>
-                <a:spcPts val="300"/>
-              </a:spcAft>
-              <a:buNone/>
-            </a:pPr>
-            <a:r>
-              <a:rPr lang="en-US" sz="1200" dirty="0">
-                <a:solidFill>
-                  <a:srgbClr val="1A1A1A"/>
-                </a:solidFill>
-                <a:latin typeface="Georgia" pitchFamily="34" charset="0"/>
-                <a:ea typeface="Georgia" pitchFamily="34" charset="-122"/>
-                <a:cs typeface="Georgia" pitchFamily="34" charset="-120"/>
-              </a:rPr>
-              <a:t> — Responds to specific points raised · Responds generally · Sticks to script · Doesn't engage</a:t>
-            </a:r>
-            <a:endParaRPr lang="en-US" sz="1200" dirty="0"/>
-          </a:p>
-        </p:txBody>
-      </p:sp>
-      <p:sp>
-        <p:nvSpPr>
-          <p:cNvPr id="7" name="Text 5"/>
+        </p:txBody>
+      </p:sp>
+      <p:sp>
+        <p:nvSpPr>
+          <p:cNvPr id="5" name="Text 3"/>
           <p:cNvSpPr/>
           <p:nvPr/>
         </p:nvSpPr>
@@ -4345,7 +5234,7 @@
                 <a:ea typeface="Times New Roman" pitchFamily="34" charset="-122"/>
                 <a:cs typeface="Times New Roman" pitchFamily="34" charset="-120"/>
               </a:rPr>
-              <a:t>Wrap-up (10 min)</a:t>
+              <a:t>Debate (25 min)</a:t>
             </a:r>
             <a:endParaRPr lang="en-US" sz="1800" dirty="0"/>
           </a:p>
@@ -4359,8 +5248,8 @@
         </p:nvSpPr>
         <p:spPr>
           <a:xfrm>
-            <a:off x="406301" y="870942"/>
-            <a:ext cx="8498026" cy="639812"/>
+            <a:off x="634901" y="883593"/>
+            <a:ext cx="8102798" cy="1744563"/>
           </a:xfrm>
           <a:prstGeom prst="rect">
             <a:avLst/>
@@ -4372,17 +5261,15 @@
           <a:bodyPr wrap="square" lIns="0" tIns="0" rIns="0" bIns="0" rtlCol="0" anchor="t"/>
           <a:lstStyle/>
           <a:p>
-            <a:pPr algn="l" indent="0" marL="0">
-              <a:lnSpc>
-                <a:spcPts val="1680"/>
-              </a:lnSpc>
-              <a:spcBef>
-                <a:spcPts val="300"/>
-              </a:spcBef>
-              <a:spcAft>
-                <a:spcPts val="300"/>
-              </a:spcAft>
-              <a:buNone/>
+            <a:pPr algn="l" marL="342900" indent="-342900">
+              <a:lnSpc>
+                <a:spcPts val="1620"/>
+              </a:lnSpc>
+              <a:spcAft>
+                <a:spcPts val="300"/>
+              </a:spcAft>
+              <a:buSzPct val="100000"/>
+              <a:buChar char="•"/>
             </a:pPr>
             <a:r>
               <a:rPr lang="en-US" sz="1200" dirty="0">
@@ -4393,42 +5280,20 @@
                 <a:ea typeface="Georgia" pitchFamily="34" charset="-122"/>
                 <a:cs typeface="Georgia" pitchFamily="34" charset="-120"/>
               </a:rPr>
-              <a:t>– Take 3 student reflections: </a:t>
-            </a:r>
-            <a:pPr algn="l" indent="0" marL="0">
-              <a:lnSpc>
-                <a:spcPts val="1680"/>
-              </a:lnSpc>
-              <a:spcBef>
-                <a:spcPts val="300"/>
-              </a:spcBef>
-              <a:spcAft>
-                <a:spcPts val="300"/>
-              </a:spcAft>
-              <a:buNone/>
-            </a:pPr>
-            <a:r>
-              <a:rPr lang="en-US" sz="1200" i="1" dirty="0">
-                <a:solidFill>
-                  <a:srgbClr val="1A1A1A"/>
-                </a:solidFill>
-                <a:latin typeface="Georgia" pitchFamily="34" charset="0"/>
-                <a:ea typeface="Georgia" pitchFamily="34" charset="-122"/>
-                <a:cs typeface="Georgia" pitchFamily="34" charset="-120"/>
-              </a:rPr>
-              <a:t>"Did anyone's mind change during the debate?"</a:t>
-            </a:r>
-            <a:pPr algn="l" indent="0" marL="0">
-              <a:lnSpc>
-                <a:spcPts val="1680"/>
-              </a:lnSpc>
-              <a:spcBef>
-                <a:spcPts val="300"/>
-              </a:spcBef>
-              <a:spcAft>
-                <a:spcPts val="300"/>
-              </a:spcAft>
-              <a:buNone/>
+              <a:t>Divide class into 3 groups by position (let students self-select; balance roughly).</a:t>
+            </a:r>
+            <a:endParaRPr lang="en-US" sz="1200" dirty="0"/>
+          </a:p>
+          <a:p>
+            <a:pPr algn="l" marL="342900" indent="-342900">
+              <a:lnSpc>
+                <a:spcPts val="1620"/>
+              </a:lnSpc>
+              <a:spcAft>
+                <a:spcPts val="300"/>
+              </a:spcAft>
+              <a:buSzPct val="100000"/>
+              <a:buChar char="•"/>
             </a:pPr>
             <a:r>
               <a:rPr lang="en-US" sz="1200" dirty="0">
@@ -4439,42 +5304,20 @@
                 <a:ea typeface="Georgia" pitchFamily="34" charset="-122"/>
                 <a:cs typeface="Georgia" pitchFamily="34" charset="-120"/>
               </a:rPr>
-              <a:t> – Note: the goal is not to "win" but to </a:t>
-            </a:r>
-            <a:pPr algn="l" indent="0" marL="0">
-              <a:lnSpc>
-                <a:spcPts val="1680"/>
-              </a:lnSpc>
-              <a:spcBef>
-                <a:spcPts val="300"/>
-              </a:spcBef>
-              <a:spcAft>
-                <a:spcPts val="300"/>
-              </a:spcAft>
-              <a:buNone/>
-            </a:pPr>
-            <a:r>
-              <a:rPr lang="en-US" sz="1200" i="1" dirty="0">
-                <a:solidFill>
-                  <a:srgbClr val="1A1A1A"/>
-                </a:solidFill>
-                <a:latin typeface="Georgia" pitchFamily="34" charset="0"/>
-                <a:ea typeface="Georgia" pitchFamily="34" charset="-122"/>
-                <a:cs typeface="Georgia" pitchFamily="34" charset="-120"/>
-              </a:rPr>
-              <a:t>understand the strongest version of each position</a:t>
-            </a:r>
-            <a:pPr algn="l" indent="0" marL="0">
-              <a:lnSpc>
-                <a:spcPts val="1680"/>
-              </a:lnSpc>
-              <a:spcBef>
-                <a:spcPts val="300"/>
-              </a:spcBef>
-              <a:spcAft>
-                <a:spcPts val="300"/>
-              </a:spcAft>
-              <a:buNone/>
+              <a:t>5 min: each group prepares — strongest 2 arguments, 1 steel-manned response to the other two positions.</a:t>
+            </a:r>
+            <a:endParaRPr lang="en-US" sz="1200" dirty="0"/>
+          </a:p>
+          <a:p>
+            <a:pPr algn="l" marL="342900" indent="-342900">
+              <a:lnSpc>
+                <a:spcPts val="1620"/>
+              </a:lnSpc>
+              <a:spcAft>
+                <a:spcPts val="300"/>
+              </a:spcAft>
+              <a:buSzPct val="100000"/>
+              <a:buChar char="•"/>
             </a:pPr>
             <a:r>
               <a:rPr lang="en-US" sz="1200" dirty="0">
@@ -4485,30 +5328,103 @@
                 <a:ea typeface="Georgia" pitchFamily="34" charset="-122"/>
                 <a:cs typeface="Georgia" pitchFamily="34" charset="-120"/>
               </a:rPr>
-              <a:t>. – Preview Day 8: </a:t>
-            </a:r>
-            <a:pPr algn="l" indent="0" marL="0">
-              <a:lnSpc>
-                <a:spcPts val="1680"/>
-              </a:lnSpc>
-              <a:spcBef>
-                <a:spcPts val="300"/>
-              </a:spcBef>
-              <a:spcAft>
-                <a:spcPts val="300"/>
-              </a:spcAft>
-              <a:buNone/>
-            </a:pPr>
-            <a:r>
-              <a:rPr lang="en-US" sz="1200" i="1" dirty="0">
-                <a:solidFill>
-                  <a:srgbClr val="1A1A1A"/>
-                </a:solidFill>
-                <a:latin typeface="Georgia" pitchFamily="34" charset="0"/>
-                <a:ea typeface="Georgia" pitchFamily="34" charset="-122"/>
-                <a:cs typeface="Georgia" pitchFamily="34" charset="-120"/>
-              </a:rPr>
-              <a:t>"Tomorrow you start your paper. Use this debate to sharpen your own thesis."</a:t>
+              <a:t>12 min: structured debate. Each group has 4 min.</a:t>
+            </a:r>
+            <a:endParaRPr lang="en-US" sz="1200" dirty="0"/>
+          </a:p>
+          <a:p>
+            <a:pPr algn="l" marL="342900" indent="-342900">
+              <a:lnSpc>
+                <a:spcPts val="1620"/>
+              </a:lnSpc>
+              <a:spcAft>
+                <a:spcPts val="300"/>
+              </a:spcAft>
+              <a:buSzPct val="100000"/>
+              <a:buChar char="•"/>
+            </a:pPr>
+            <a:r>
+              <a:rPr lang="en-US" sz="1200" dirty="0">
+                <a:solidFill>
+                  <a:srgbClr val="1A1A1A"/>
+                </a:solidFill>
+                <a:latin typeface="Georgia" pitchFamily="34" charset="0"/>
+                <a:ea typeface="Georgia" pitchFamily="34" charset="-122"/>
+                <a:cs typeface="Georgia" pitchFamily="34" charset="-120"/>
+              </a:rPr>
+              <a:t>2 min: main argument.</a:t>
+            </a:r>
+            <a:endParaRPr lang="en-US" sz="1200" dirty="0"/>
+          </a:p>
+          <a:p>
+            <a:pPr algn="l" marL="342900" indent="-342900">
+              <a:lnSpc>
+                <a:spcPts val="1620"/>
+              </a:lnSpc>
+              <a:spcAft>
+                <a:spcPts val="300"/>
+              </a:spcAft>
+              <a:buSzPct val="100000"/>
+              <a:buChar char="•"/>
+            </a:pPr>
+            <a:r>
+              <a:rPr lang="en-US" sz="1200" dirty="0">
+                <a:solidFill>
+                  <a:srgbClr val="1A1A1A"/>
+                </a:solidFill>
+                <a:latin typeface="Georgia" pitchFamily="34" charset="0"/>
+                <a:ea typeface="Georgia" pitchFamily="34" charset="-122"/>
+                <a:cs typeface="Georgia" pitchFamily="34" charset="-120"/>
+              </a:rPr>
+              <a:t>1 min: response to the other 2 positions.</a:t>
+            </a:r>
+            <a:endParaRPr lang="en-US" sz="1200" dirty="0"/>
+          </a:p>
+          <a:p>
+            <a:pPr algn="l" marL="342900" indent="-342900">
+              <a:lnSpc>
+                <a:spcPts val="1620"/>
+              </a:lnSpc>
+              <a:spcAft>
+                <a:spcPts val="300"/>
+              </a:spcAft>
+              <a:buSzPct val="100000"/>
+              <a:buChar char="•"/>
+            </a:pPr>
+            <a:r>
+              <a:rPr lang="en-US" sz="1200" dirty="0">
+                <a:solidFill>
+                  <a:srgbClr val="1A1A1A"/>
+                </a:solidFill>
+                <a:latin typeface="Georgia" pitchFamily="34" charset="0"/>
+                <a:ea typeface="Georgia" pitchFamily="34" charset="-122"/>
+                <a:cs typeface="Georgia" pitchFamily="34" charset="-120"/>
+              </a:rPr>
+              <a:t>1 min: closing.</a:t>
+            </a:r>
+            <a:endParaRPr lang="en-US" sz="1200" dirty="0"/>
+          </a:p>
+          <a:p>
+            <a:pPr algn="l" marL="342900" indent="-342900">
+              <a:lnSpc>
+                <a:spcPts val="1620"/>
+              </a:lnSpc>
+              <a:spcAft>
+                <a:spcPts val="300"/>
+              </a:spcAft>
+              <a:buSzPct val="100000"/>
+              <a:buChar char="•"/>
+            </a:pPr>
+            <a:r>
+              <a:rPr lang="en-US" sz="1200" dirty="0">
+                <a:solidFill>
+                  <a:srgbClr val="1A1A1A"/>
+                </a:solidFill>
+                <a:latin typeface="Georgia" pitchFamily="34" charset="0"/>
+                <a:ea typeface="Georgia" pitchFamily="34" charset="-122"/>
+                <a:cs typeface="Georgia" pitchFamily="34" charset="-120"/>
+              </a:rPr>
+              <a:t>8 min: open floor cross-questions.</a:t>
             </a:r>
             <a:endParaRPr lang="en-US" sz="1200" dirty="0"/>
           </a:p>
@@ -4666,7 +5582,7 @@
                 <a:ea typeface="Times New Roman" pitchFamily="34" charset="-122"/>
                 <a:cs typeface="Times New Roman" pitchFamily="34" charset="-120"/>
               </a:rPr>
-              <a:t>Differentiation</a:t>
+              <a:t>Oral assessment (during the debate)</a:t>
             </a:r>
             <a:endParaRPr lang="en-US" sz="1800" dirty="0"/>
           </a:p>
@@ -4680,8 +5596,8 @@
         </p:nvSpPr>
         <p:spPr>
           <a:xfrm>
-            <a:off x="634901" y="883593"/>
-            <a:ext cx="8102798" cy="525661"/>
+            <a:off x="406301" y="870942"/>
+            <a:ext cx="8498026" cy="213271"/>
           </a:xfrm>
           <a:prstGeom prst="rect">
             <a:avLst/>
@@ -4693,31 +5609,13 @@
           <a:bodyPr wrap="square" lIns="0" tIns="0" rIns="0" bIns="0" rtlCol="0" anchor="t"/>
           <a:lstStyle/>
           <a:p>
-            <a:pPr algn="l" marL="342900" indent="-342900">
-              <a:lnSpc>
-                <a:spcPts val="1620"/>
-              </a:lnSpc>
-              <a:spcAft>
-                <a:spcPts val="300"/>
-              </a:spcAft>
-              <a:buSzPct val="100000"/>
-              <a:buChar char="•"/>
-            </a:pPr>
-            <a:r>
-              <a:rPr lang="en-US" sz="1200" b="1" dirty="0">
-                <a:solidFill>
-                  <a:srgbClr val="1A1A1A"/>
-                </a:solidFill>
-                <a:latin typeface="Georgia" pitchFamily="34" charset="0"/>
-                <a:ea typeface="Georgia" pitchFamily="34" charset="-122"/>
-                <a:cs typeface="Georgia" pitchFamily="34" charset="-120"/>
-              </a:rPr>
-              <a:t>Tier up:</a:t>
-            </a:r>
             <a:pPr algn="l" indent="0" marL="0">
               <a:lnSpc>
-                <a:spcPts val="1620"/>
-              </a:lnSpc>
+                <a:spcPts val="1680"/>
+              </a:lnSpc>
+              <a:spcBef>
+                <a:spcPts val="300"/>
+              </a:spcBef>
               <a:spcAft>
                 <a:spcPts val="300"/>
               </a:spcAft>
@@ -4732,51 +5630,55 @@
                 <a:ea typeface="Georgia" pitchFamily="34" charset="-122"/>
                 <a:cs typeface="Georgia" pitchFamily="34" charset="-120"/>
               </a:rPr>
-              <a:t> Take a position you DISAGREE with and defend it. (The hardest form of argument.)</a:t>
+              <a:t>Teacher uses this rubric to score 5 students chosen at random:</a:t>
             </a:r>
             <a:endParaRPr lang="en-US" sz="1200" dirty="0"/>
           </a:p>
-          <a:p>
-            <a:pPr algn="l" marL="342900" indent="-342900">
-              <a:lnSpc>
-                <a:spcPts val="1620"/>
-              </a:lnSpc>
-              <a:spcAft>
-                <a:spcPts val="300"/>
-              </a:spcAft>
-              <a:buSzPct val="100000"/>
-              <a:buChar char="•"/>
-            </a:pPr>
-            <a:r>
-              <a:rPr lang="en-US" sz="1200" b="1" dirty="0">
-                <a:solidFill>
-                  <a:srgbClr val="1A1A1A"/>
-                </a:solidFill>
-                <a:latin typeface="Georgia" pitchFamily="34" charset="0"/>
-                <a:ea typeface="Georgia" pitchFamily="34" charset="-122"/>
-                <a:cs typeface="Georgia" pitchFamily="34" charset="-120"/>
-              </a:rPr>
-              <a:t>Tier down:</a:t>
-            </a:r>
+        </p:txBody>
+      </p:sp>
+      <p:sp>
+        <p:nvSpPr>
+          <p:cNvPr id="5" name="Text 3"/>
+          <p:cNvSpPr/>
+          <p:nvPr/>
+        </p:nvSpPr>
+        <p:spPr>
+          <a:xfrm>
+            <a:off x="406301" y="1160413"/>
+            <a:ext cx="8498026" cy="213271"/>
+          </a:xfrm>
+          <a:prstGeom prst="rect">
+            <a:avLst/>
+          </a:prstGeom>
+          <a:noFill/>
+          <a:ln/>
+        </p:spPr>
+        <p:txBody>
+          <a:bodyPr wrap="square" lIns="0" tIns="0" rIns="0" bIns="0" rtlCol="0" anchor="t"/>
+          <a:lstStyle/>
+          <a:p>
             <a:pPr algn="l" indent="0" marL="0">
               <a:lnSpc>
-                <a:spcPts val="1620"/>
-              </a:lnSpc>
-              <a:spcAft>
-                <a:spcPts val="300"/>
-              </a:spcAft>
-              <a:buNone/>
-            </a:pPr>
-            <a:r>
-              <a:rPr lang="en-US" sz="1200" dirty="0">
-                <a:solidFill>
-                  <a:srgbClr val="1A1A1A"/>
-                </a:solidFill>
-                <a:latin typeface="Georgia" pitchFamily="34" charset="0"/>
-                <a:ea typeface="Georgia" pitchFamily="34" charset="-122"/>
-                <a:cs typeface="Georgia" pitchFamily="34" charset="-120"/>
-              </a:rPr>
-              <a:t> Pre-prepare your 2-minute argument the night before.</a:t>
+                <a:spcPts val="1680"/>
+              </a:lnSpc>
+              <a:spcBef>
+                <a:spcPts val="300"/>
+              </a:spcBef>
+              <a:spcAft>
+                <a:spcPts val="300"/>
+              </a:spcAft>
+              <a:buNone/>
+            </a:pPr>
+            <a:r>
+              <a:rPr lang="en-US" sz="1200" i="1" dirty="0">
+                <a:solidFill>
+                  <a:srgbClr val="1A1A1A"/>
+                </a:solidFill>
+                <a:latin typeface="Georgia" pitchFamily="34" charset="0"/>
+                <a:ea typeface="Georgia" pitchFamily="34" charset="-122"/>
+                <a:cs typeface="Georgia" pitchFamily="34" charset="-120"/>
+              </a:rPr>
+              <a:t>Each row: Criterion · 4 · 3 · 2 · 1.</a:t>
             </a:r>
             <a:endParaRPr lang="en-US" sz="1200" dirty="0"/>
           </a:p>
@@ -4784,7 +5686,7 @@
       </p:sp>
       <p:sp>
         <p:nvSpPr>
-          <p:cNvPr id="5" name="Text 3"/>
+          <p:cNvPr id="6" name="Text 4"/>
           <p:cNvSpPr/>
           <p:nvPr/>
         </p:nvSpPr>
